--- a/Foundation_F1/F1-L08_Reading_Aloud_Decoding.pptx
+++ b/Foundation_F1/F1-L08_Reading_Aloud_Decoding.pptx
@@ -802,7 +802,11 @@
           <a:lstStyle/>
           <a:p>
             <a:r>
-              <a:rPr lang="en-US" dirty="0"/>
+              <a:rPr lang="ar-SA" dirty="0">
+                <a:latin typeface="Amiri" pitchFamily="2" charset="-78"/>
+                <a:ea typeface="Amiri" pitchFamily="2" charset="-78"/>
+                <a:cs typeface="Amiri" pitchFamily="2" charset="-78"/>
+              </a:rPr>
               <a:t>I DO — LEVEL 1 STRIP (4 min), the website’s ten words. For each word: teacher reads with the READ routine aloud → class echoes (mics on for a moment) → one volunteer (invitation).
 Support, then remove it (website): after the first pass, cover the English column (or hide this slide) and reread from the Arabic only.
 Notice: all ten are three-letter past verbs; watch for the kasra in شَرِبَ، سَمِعَ، لَعِبَ.</a:t>
@@ -892,7 +896,11 @@
           <a:lstStyle/>
           <a:p>
             <a:r>
-              <a:rPr lang="en-US" dirty="0"/>
+              <a:rPr lang="ar-SA" dirty="0">
+                <a:latin typeface="Amiri" pitchFamily="2" charset="-78"/>
+                <a:ea typeface="Amiri" pitchFamily="2" charset="-78"/>
+                <a:cs typeface="Amiri" pitchFamily="2" charset="-78"/>
+              </a:rPr>
               <a:t>WE DO — the website’s interactive lesson game (“Picture words”) as a whole-class picture match (2 min). The sentences are the website game sentences; the pictures are icons standing in for the website images.
 ● 20s: look at each picture and find ONE key word you know in each sentence → type “1_ 2_ 3_” in the chat.
 This is the most accessible task in the lesson — use it to build confidence before independent work. Core students read the sentence aloud after the answer is revealed (by invitation).
@@ -983,7 +991,11 @@
           <a:lstStyle/>
           <a:p>
             <a:r>
-              <a:rPr lang="en-US" dirty="0"/>
+              <a:rPr lang="ar-SA" dirty="0">
+                <a:latin typeface="Amiri" pitchFamily="2" charset="-78"/>
+                <a:ea typeface="Amiri" pitchFamily="2" charset="-78"/>
+                <a:cs typeface="Amiri" pitchFamily="2" charset="-78"/>
+              </a:rPr>
               <a:t>WE DO — the website’s interactive lesson game (“Picture words”) as a whole-class picture match (2 min). The sentences are the website game sentences; the pictures are icons standing in for the website images.
 ● 20s: look at each picture and find ONE key word you know in each sentence → type “1_ 2_ 3_” in the chat.
 This is the most accessible task in the lesson — use it to build confidence before independent work. Core students read the sentence aloud after the answer is revealed (by invitation).
@@ -1250,7 +1262,11 @@
           <a:lstStyle/>
           <a:p>
             <a:r>
-              <a:rPr lang="en-US" dirty="0"/>
+              <a:rPr lang="ar-SA" dirty="0">
+                <a:latin typeface="Amiri" pitchFamily="2" charset="-78"/>
+                <a:ea typeface="Amiri" pitchFamily="2" charset="-78"/>
+                <a:cs typeface="Amiri" pitchFamily="2" charset="-78"/>
+              </a:rPr>
               <a:t>WE DO — LEVEL 2 STRIP (Develop; everyone tries). Read word by word, then repeat the phrase without a pause between every syllable (website).
 Choral → pairs → volunteers. Sun/moon revision: البَيْتِ and الفَصْلِ both start with MOON letters (ب, ف), so the l is heard: al-bayti, al-faṣli.
 Useful classroom phrase: لَا أَفْهَمُ — I do not understand (website feedback phrases).</a:t>
@@ -1340,7 +1356,11 @@
           <a:lstStyle/>
           <a:p>
             <a:r>
-              <a:rPr lang="en-US" dirty="0"/>
+              <a:rPr lang="ar-SA" dirty="0">
+                <a:latin typeface="Amiri" pitchFamily="2" charset="-78"/>
+                <a:ea typeface="Amiri" pitchFamily="2" charset="-78"/>
+                <a:cs typeface="Amiri" pitchFamily="2" charset="-78"/>
+              </a:rPr>
               <a:t>LEVEL 3 STRIP (Stretch / FLEX). The | marks are the website’s word groups — pause lightly there and fully at the full stop.
 Website listening (read aloud first, twice): “قَرَأَتْ مَرْيَمُ كِتَابًا قَصِيرًا. ذَهَبَ سَامِرٌ إِلَى المَدْرَسَةِ.” — students track and mark where the reader pauses. Answer (website): a full pause after قَصِيرًا; the second sentence ends after المَدْرَسَةِ.</a:t>
             </a:r>
@@ -1429,7 +1449,11 @@
           <a:lstStyle/>
           <a:p>
             <a:r>
-              <a:rPr lang="en-US" dirty="0"/>
+              <a:rPr lang="ar-SA" dirty="0">
+                <a:latin typeface="Amiri" pitchFamily="2" charset="-78"/>
+                <a:ea typeface="Amiri" pitchFamily="2" charset="-78"/>
+                <a:cs typeface="Amiri" pitchFamily="2" charset="-78"/>
+              </a:rPr>
               <a:t>YOU DO (7 min) — the website graded workshop: choose the level where you can apply READ with productive effort; practise privately, read to a partner, then level up only after accuracy is stable.
 Personal fluency challenge (website, Stretch): كَتَبَ مَكْتَبٌ قَرَأَ كِتَابٌ سِتَّةٌ يَقْرَأُ بَيْتٌ مُعَلِّمٌ مَدْرَسَةٌ آمِنٌ — time is a personal baseline only.
 Live feedback: listen to one student per route in private (mic on).</a:t>
@@ -1519,7 +1543,11 @@
           <a:lstStyle/>
           <a:p>
             <a:r>
-              <a:rPr lang="en-US" dirty="0"/>
+              <a:rPr lang="ar-SA" dirty="0">
+                <a:latin typeface="Amiri" pitchFamily="2" charset="-78"/>
+                <a:ea typeface="Amiri" pitchFamily="2" charset="-78"/>
+                <a:cs typeface="Amiri" pitchFamily="2" charset="-78"/>
+              </a:rPr>
               <a:t>WELCOME (1 min) — while students join.
 • Greet each student by name as they arrive: السَّلَامُ عَلَيْكُمْ. Take the register (Pastoral Tracker: attendance 0/1).
 • 2-MINUTE CHECK-IN (SEND training): a private chat to any student who seemed unsettled last lesson — “Are you okay today? 👍 / 👎”.
@@ -1612,7 +1640,11 @@
           <a:lstStyle/>
           <a:p>
             <a:r>
-              <a:rPr lang="en-US" dirty="0"/>
+              <a:rPr lang="ar-SA" dirty="0">
+                <a:latin typeface="Amiri" pitchFamily="2" charset="-78"/>
+                <a:ea typeface="Amiri" pitchFamily="2" charset="-78"/>
+                <a:cs typeface="Amiri" pitchFamily="2" charset="-78"/>
+              </a:rPr>
               <a:t>SPEAKING REHEARSAL (3 min) — website speaking prompts (the Core prompt is teacher-made). No breakout rooms (saves setup time).
 Sequence: ● 10s think → ↔ 45s everyone rehearses their answer aloud with mic muted → ◎ pairs on open mic: name two students (warned in advance); A asks, B answers; the rest of the class types one follow-up question in chat (+ / ?) → ↺ one student summarises the answer they heard.
 Routes: Core uses the Core prompt and stem; Develop the Develop prompts; Stretch the last prompt.
@@ -2603,7 +2635,11 @@
           <a:lstStyle/>
           <a:p>
             <a:r>
-              <a:rPr lang="en-US" dirty="0"/>
+              <a:rPr lang="ar-SA" dirty="0">
+                <a:latin typeface="Amiri" pitchFamily="2" charset="-78"/>
+                <a:ea typeface="Amiri" pitchFamily="2" charset="-78"/>
+                <a:cs typeface="Amiri" pitchFamily="2" charset="-78"/>
+              </a:rPr>
               <a:t>KEY WORDS — HOW TO TEACH EACH GROUP (EAL pre-teaching routine, 7 min)
 1. HEAR IT: say the word twice, clearly, with a gesture where possible.
 2. SAY IT: choral repetition — “I say, you say” — then two volunteers.
@@ -2698,7 +2734,11 @@
           <a:lstStyle/>
           <a:p>
             <a:r>
-              <a:rPr lang="en-US" dirty="0"/>
+              <a:rPr lang="ar-SA" dirty="0">
+                <a:latin typeface="Amiri" pitchFamily="2" charset="-78"/>
+                <a:ea typeface="Amiri" pitchFamily="2" charset="-78"/>
+                <a:cs typeface="Amiri" pitchFamily="2" charset="-78"/>
+              </a:rPr>
               <a:t>THE READ ROUTINE (website Part 1). READ is an English memory aid; the processing stays anchored in Arabic letters and marks.
 Model the think-aloud on كَتَبَ exactly as in the right-hand column. Then the two website contrasts:
 • sukūn closes a chunk: مَكْ + تَ + بٌ → مَكْتَبٌ — do not say ma-ka-tab (maktabun; at a pause: maktab).
@@ -2790,7 +2830,11 @@
           <a:lstStyle/>
           <a:p>
             <a:r>
-              <a:rPr lang="en-US" dirty="0"/>
+              <a:rPr lang="ar-SA" dirty="0">
+                <a:latin typeface="Amiri" pitchFamily="2" charset="-78"/>
+                <a:ea typeface="Amiri" pitchFamily="2" charset="-78"/>
+                <a:cs typeface="Amiri" pitchFamily="2" charset="-78"/>
+              </a:rPr>
               <a:t>MARK-TO-SOUND SCAN (website Part 2) — a one-slide summary of F1-L04 to F1-L06.
 Connected reading vs pause (website): fully vowelled texts may show endings; at a natural stop, final short vowels and tanwīn are not read the same way (جَدِيدٌ … pause as jadīd). Before reading a strip, say which mode you are using and keep to it.</a:t>
             </a:r>
@@ -3275,6 +3319,7 @@
                   <a:srgbClr val="D4AF37"/>
                 </a:solidFill>
                 <a:latin typeface="Amiri" pitchFamily="2" charset="-78"/>
+                <a:ea typeface="Amiri" pitchFamily="2" charset="-78"/>
                 <a:cs typeface="Amiri" pitchFamily="2" charset="-78"/>
               </a:rPr>
               <a:t>م</a:t>
@@ -3481,6 +3526,7 @@
                   <a:srgbClr val="D4AF37"/>
                 </a:solidFill>
                 <a:latin typeface="Amiri" pitchFamily="2" charset="-78"/>
+                <a:ea typeface="Amiri" pitchFamily="2" charset="-78"/>
                 <a:cs typeface="Amiri" pitchFamily="2" charset="-78"/>
               </a:rPr>
               <a:t>القِرَاءَةُ الجَهْرِيَّةُ وَرَبْطُ الكِتَابَةِ بِالصَّوْتِ</a:t>
@@ -3938,6 +3984,7 @@
                   <a:srgbClr val="D4AF37"/>
                 </a:solidFill>
                 <a:latin typeface="Amiri" pitchFamily="2" charset="-78"/>
+                <a:ea typeface="Amiri" pitchFamily="2" charset="-78"/>
                 <a:cs typeface="Amiri" pitchFamily="2" charset="-78"/>
               </a:rPr>
               <a:t>م</a:t>
@@ -4258,6 +4305,7 @@
                   <a:srgbClr val="8A6D1E"/>
                 </a:solidFill>
                 <a:latin typeface="Amiri" pitchFamily="2" charset="-78"/>
+                <a:ea typeface="Amiri" pitchFamily="2" charset="-78"/>
                 <a:cs typeface="Amiri" pitchFamily="2" charset="-78"/>
               </a:rPr>
               <a:t>فَحْصٌ سَرِيعٌ</a:t>
@@ -4444,6 +4492,7 @@
                   <a:srgbClr val="1B3B6F"/>
                 </a:solidFill>
                 <a:latin typeface="Amiri" pitchFamily="2" charset="-78"/>
+                <a:ea typeface="Amiri" pitchFamily="2" charset="-78"/>
                 <a:cs typeface="Amiri" pitchFamily="2" charset="-78"/>
               </a:rPr>
               <a:t>كَتَبَ</a:t>
@@ -4571,6 +4620,7 @@
                   <a:srgbClr val="1F2A37"/>
                 </a:solidFill>
                 <a:latin typeface="Amiri" pitchFamily="2" charset="-78"/>
+                <a:ea typeface="Amiri" pitchFamily="2" charset="-78"/>
                 <a:cs typeface="Amiri" pitchFamily="2" charset="-78"/>
               </a:rPr>
               <a:t>ب</a:t>
@@ -4698,6 +4748,7 @@
                   <a:srgbClr val="1F2A37"/>
                 </a:solidFill>
                 <a:latin typeface="Amiri" pitchFamily="2" charset="-78"/>
+                <a:ea typeface="Amiri" pitchFamily="2" charset="-78"/>
                 <a:cs typeface="Amiri" pitchFamily="2" charset="-78"/>
               </a:rPr>
               <a:t>ك</a:t>
@@ -4859,6 +4910,7 @@
                   <a:srgbClr val="1B3B6F"/>
                 </a:solidFill>
                 <a:latin typeface="Amiri" pitchFamily="2" charset="-78"/>
+                <a:ea typeface="Amiri" pitchFamily="2" charset="-78"/>
                 <a:cs typeface="Amiri" pitchFamily="2" charset="-78"/>
               </a:rPr>
               <a:t>مَكْتَبٌ</a:t>
@@ -5323,6 +5375,7 @@
                   <a:srgbClr val="1B3B6F"/>
                 </a:solidFill>
                 <a:latin typeface="Amiri" pitchFamily="2" charset="-78"/>
+                <a:ea typeface="Amiri" pitchFamily="2" charset="-78"/>
                 <a:cs typeface="Amiri" pitchFamily="2" charset="-78"/>
               </a:rPr>
               <a:t>تَا</a:t>
@@ -5349,6 +5402,7 @@
                   <a:srgbClr val="1B3B6F"/>
                 </a:solidFill>
                 <a:latin typeface="Amiri" pitchFamily="2" charset="-78"/>
+                <a:ea typeface="Amiri" pitchFamily="2" charset="-78"/>
                 <a:cs typeface="Amiri" pitchFamily="2" charset="-78"/>
               </a:rPr>
               <a:t>كِتَابٌ</a:t>
@@ -6034,6 +6088,7 @@
                   <a:srgbClr val="D4AF37"/>
                 </a:solidFill>
                 <a:latin typeface="Amiri" pitchFamily="2" charset="-78"/>
+                <a:ea typeface="Amiri" pitchFamily="2" charset="-78"/>
                 <a:cs typeface="Amiri" pitchFamily="2" charset="-78"/>
               </a:rPr>
               <a:t>م</a:t>
@@ -6354,6 +6409,7 @@
                   <a:srgbClr val="8A6D1E"/>
                 </a:solidFill>
                 <a:latin typeface="Amiri" pitchFamily="2" charset="-78"/>
+                <a:ea typeface="Amiri" pitchFamily="2" charset="-78"/>
                 <a:cs typeface="Amiri" pitchFamily="2" charset="-78"/>
               </a:rPr>
               <a:t>الإِجَابَاتُ وَالتَّعْلِيلُ</a:t>
@@ -6540,6 +6596,7 @@
                   <a:srgbClr val="1B3B6F"/>
                 </a:solidFill>
                 <a:latin typeface="Amiri" pitchFamily="2" charset="-78"/>
+                <a:ea typeface="Amiri" pitchFamily="2" charset="-78"/>
                 <a:cs typeface="Amiri" pitchFamily="2" charset="-78"/>
               </a:rPr>
               <a:t>كَتَبَ</a:t>
@@ -6667,6 +6724,7 @@
                   <a:srgbClr val="9AA1AB"/>
                 </a:solidFill>
                 <a:latin typeface="Amiri" pitchFamily="2" charset="-78"/>
+                <a:ea typeface="Amiri" pitchFamily="2" charset="-78"/>
                 <a:cs typeface="Amiri" pitchFamily="2" charset="-78"/>
               </a:rPr>
               <a:t>ب</a:t>
@@ -6821,6 +6879,7 @@
                   <a:srgbClr val="1F2A37"/>
                 </a:solidFill>
                 <a:latin typeface="Amiri" pitchFamily="2" charset="-78"/>
+                <a:ea typeface="Amiri" pitchFamily="2" charset="-78"/>
                 <a:cs typeface="Amiri" pitchFamily="2" charset="-78"/>
               </a:rPr>
               <a:t>ك</a:t>
@@ -7020,6 +7079,7 @@
                   <a:srgbClr val="1B3B6F"/>
                 </a:solidFill>
                 <a:latin typeface="Amiri" pitchFamily="2" charset="-78"/>
+                <a:ea typeface="Amiri" pitchFamily="2" charset="-78"/>
                 <a:cs typeface="Amiri" pitchFamily="2" charset="-78"/>
               </a:rPr>
               <a:t>مَكْتَبٌ</a:t>
@@ -7414,6 +7474,7 @@
                   <a:srgbClr val="8A6D1E"/>
                 </a:solidFill>
                 <a:latin typeface="Amiri" pitchFamily="2" charset="-78"/>
+                <a:ea typeface="Amiri" pitchFamily="2" charset="-78"/>
                 <a:cs typeface="Amiri" pitchFamily="2" charset="-78"/>
               </a:rPr>
               <a:t>كْ</a:t>
@@ -7575,6 +7636,7 @@
                   <a:srgbClr val="1B3B6F"/>
                 </a:solidFill>
                 <a:latin typeface="Amiri" pitchFamily="2" charset="-78"/>
+                <a:ea typeface="Amiri" pitchFamily="2" charset="-78"/>
                 <a:cs typeface="Amiri" pitchFamily="2" charset="-78"/>
               </a:rPr>
               <a:t>تَا</a:t>
@@ -7601,6 +7663,7 @@
                   <a:srgbClr val="1B3B6F"/>
                 </a:solidFill>
                 <a:latin typeface="Amiri" pitchFamily="2" charset="-78"/>
+                <a:ea typeface="Amiri" pitchFamily="2" charset="-78"/>
                 <a:cs typeface="Amiri" pitchFamily="2" charset="-78"/>
               </a:rPr>
               <a:t>كِتَابٌ</a:t>
@@ -8416,6 +8479,7 @@
                   <a:srgbClr val="D4AF37"/>
                 </a:solidFill>
                 <a:latin typeface="Amiri" pitchFamily="2" charset="-78"/>
+                <a:ea typeface="Amiri" pitchFamily="2" charset="-78"/>
                 <a:cs typeface="Amiri" pitchFamily="2" charset="-78"/>
               </a:rPr>
               <a:t>م</a:t>
@@ -8736,6 +8800,7 @@
                   <a:srgbClr val="8A6D1E"/>
                 </a:solidFill>
                 <a:latin typeface="Amiri" pitchFamily="2" charset="-78"/>
+                <a:ea typeface="Amiri" pitchFamily="2" charset="-78"/>
                 <a:cs typeface="Amiri" pitchFamily="2" charset="-78"/>
               </a:rPr>
               <a:t>شَرِيطُ القِرَاءَةِ ١</a:t>
@@ -8839,6 +8904,7 @@
                   <a:srgbClr val="1B3B6F"/>
                 </a:solidFill>
                 <a:latin typeface="Amiri" pitchFamily="2" charset="-78"/>
+                <a:ea typeface="Amiri" pitchFamily="2" charset="-78"/>
                 <a:cs typeface="Amiri" pitchFamily="2" charset="-78"/>
               </a:rPr>
               <a:t>كَتَبَ  ·  قَرَأَ</a:t>
@@ -8942,6 +9008,7 @@
                   <a:srgbClr val="1B3B6F"/>
                 </a:solidFill>
                 <a:latin typeface="Amiri" pitchFamily="2" charset="-78"/>
+                <a:ea typeface="Amiri" pitchFamily="2" charset="-78"/>
                 <a:cs typeface="Amiri" pitchFamily="2" charset="-78"/>
               </a:rPr>
               <a:t>ذَهَبَ  ·  رَجَعَ</a:t>
@@ -9045,6 +9112,7 @@
                   <a:srgbClr val="1B3B6F"/>
                 </a:solidFill>
                 <a:latin typeface="Amiri" pitchFamily="2" charset="-78"/>
+                <a:ea typeface="Amiri" pitchFamily="2" charset="-78"/>
                 <a:cs typeface="Amiri" pitchFamily="2" charset="-78"/>
               </a:rPr>
               <a:t>شَرِبَ  ·  جَلَسَ</a:t>
@@ -9148,6 +9216,7 @@
                   <a:srgbClr val="1B3B6F"/>
                 </a:solidFill>
                 <a:latin typeface="Amiri" pitchFamily="2" charset="-78"/>
+                <a:ea typeface="Amiri" pitchFamily="2" charset="-78"/>
                 <a:cs typeface="Amiri" pitchFamily="2" charset="-78"/>
               </a:rPr>
               <a:t>فَتَحَ  ·  دَرَسَ</a:t>
@@ -9251,6 +9320,7 @@
                   <a:srgbClr val="1B3B6F"/>
                 </a:solidFill>
                 <a:latin typeface="Amiri" pitchFamily="2" charset="-78"/>
+                <a:ea typeface="Amiri" pitchFamily="2" charset="-78"/>
                 <a:cs typeface="Amiri" pitchFamily="2" charset="-78"/>
               </a:rPr>
               <a:t>سَمِعَ  ·  لَعِبَ</a:t>
@@ -9422,6 +9492,7 @@
                   <a:srgbClr val="D4AF37"/>
                 </a:solidFill>
                 <a:latin typeface="Amiri" pitchFamily="2" charset="-78"/>
+                <a:ea typeface="Amiri" pitchFamily="2" charset="-78"/>
                 <a:cs typeface="Amiri" pitchFamily="2" charset="-78"/>
               </a:rPr>
               <a:t>م</a:t>
@@ -9742,6 +9813,7 @@
                   <a:srgbClr val="8A6D1E"/>
                 </a:solidFill>
                 <a:latin typeface="Amiri" pitchFamily="2" charset="-78"/>
+                <a:ea typeface="Amiri" pitchFamily="2" charset="-78"/>
                 <a:cs typeface="Amiri" pitchFamily="2" charset="-78"/>
               </a:rPr>
               <a:t>اِقْرَأِ الإِشَارَةَ</a:t>
@@ -10346,6 +10418,7 @@
                   <a:srgbClr val="1B3B6F"/>
                 </a:solidFill>
                 <a:latin typeface="Amiri" pitchFamily="2" charset="-78"/>
+                <a:ea typeface="Amiri" pitchFamily="2" charset="-78"/>
                 <a:cs typeface="Amiri" pitchFamily="2" charset="-78"/>
               </a:rPr>
               <a:t>بَابٌ</a:t>
@@ -10474,6 +10547,7 @@
                   <a:srgbClr val="1B3B6F"/>
                 </a:solidFill>
                 <a:latin typeface="Amiri" pitchFamily="2" charset="-78"/>
+                <a:ea typeface="Amiri" pitchFamily="2" charset="-78"/>
                 <a:cs typeface="Amiri" pitchFamily="2" charset="-78"/>
               </a:rPr>
               <a:t>مَدْرَسَةٌ</a:t>
@@ -10602,6 +10676,7 @@
                   <a:srgbClr val="1B3B6F"/>
                 </a:solidFill>
                 <a:latin typeface="Amiri" pitchFamily="2" charset="-78"/>
+                <a:ea typeface="Amiri" pitchFamily="2" charset="-78"/>
                 <a:cs typeface="Amiri" pitchFamily="2" charset="-78"/>
               </a:rPr>
               <a:t>كُتُبٌ</a:t>
@@ -10811,6 +10886,7 @@
                   <a:srgbClr val="D4AF37"/>
                 </a:solidFill>
                 <a:latin typeface="Amiri" pitchFamily="2" charset="-78"/>
+                <a:ea typeface="Amiri" pitchFamily="2" charset="-78"/>
                 <a:cs typeface="Amiri" pitchFamily="2" charset="-78"/>
               </a:rPr>
               <a:t>م</a:t>
@@ -11131,6 +11207,7 @@
                   <a:srgbClr val="8A6D1E"/>
                 </a:solidFill>
                 <a:latin typeface="Amiri" pitchFamily="2" charset="-78"/>
+                <a:ea typeface="Amiri" pitchFamily="2" charset="-78"/>
                 <a:cs typeface="Amiri" pitchFamily="2" charset="-78"/>
               </a:rPr>
               <a:t>اِقْرَأِ الإِشَارَةَ</a:t>
@@ -11450,6 +11527,7 @@
                   <a:srgbClr val="1B3B6F"/>
                 </a:solidFill>
                 <a:latin typeface="Amiri" pitchFamily="2" charset="-78"/>
+                <a:ea typeface="Amiri" pitchFamily="2" charset="-78"/>
                 <a:cs typeface="Amiri" pitchFamily="2" charset="-78"/>
               </a:rPr>
               <a:t>مَدْرَسَةٌ</a:t>
@@ -11769,6 +11847,7 @@
                   <a:srgbClr val="1B3B6F"/>
                 </a:solidFill>
                 <a:latin typeface="Amiri" pitchFamily="2" charset="-78"/>
+                <a:ea typeface="Amiri" pitchFamily="2" charset="-78"/>
                 <a:cs typeface="Amiri" pitchFamily="2" charset="-78"/>
               </a:rPr>
               <a:t>كُتُبٌ</a:t>
@@ -12088,6 +12167,7 @@
                   <a:srgbClr val="1B3B6F"/>
                 </a:solidFill>
                 <a:latin typeface="Amiri" pitchFamily="2" charset="-78"/>
+                <a:ea typeface="Amiri" pitchFamily="2" charset="-78"/>
                 <a:cs typeface="Amiri" pitchFamily="2" charset="-78"/>
               </a:rPr>
               <a:t>بَابٌ</a:t>
@@ -12259,6 +12339,7 @@
                   <a:srgbClr val="D4AF37"/>
                 </a:solidFill>
                 <a:latin typeface="Amiri" pitchFamily="2" charset="-78"/>
+                <a:ea typeface="Amiri" pitchFamily="2" charset="-78"/>
                 <a:cs typeface="Amiri" pitchFamily="2" charset="-78"/>
               </a:rPr>
               <a:t>م</a:t>
@@ -12579,6 +12660,7 @@
                   <a:srgbClr val="8A6D1E"/>
                 </a:solidFill>
                 <a:latin typeface="Amiri" pitchFamily="2" charset="-78"/>
+                <a:ea typeface="Amiri" pitchFamily="2" charset="-78"/>
                 <a:cs typeface="Amiri" pitchFamily="2" charset="-78"/>
               </a:rPr>
               <a:t>اِخْتَرِ التَّقْطِيعَ</a:t>
@@ -12790,6 +12872,7 @@
                   <a:srgbClr val="1B3B6F"/>
                 </a:solidFill>
                 <a:latin typeface="Amiri" pitchFamily="2" charset="-78"/>
+                <a:ea typeface="Amiri" pitchFamily="2" charset="-78"/>
                 <a:cs typeface="Amiri" pitchFamily="2" charset="-78"/>
               </a:rPr>
               <a:t>مَكْتَبٌ</a:t>
@@ -12891,6 +12974,7 @@
                   <a:srgbClr val="1F2A37"/>
                 </a:solidFill>
                 <a:latin typeface="Amiri" pitchFamily="2" charset="-78"/>
+                <a:ea typeface="Amiri" pitchFamily="2" charset="-78"/>
                 <a:cs typeface="Amiri" pitchFamily="2" charset="-78"/>
               </a:rPr>
               <a:t>مَ | كَ | تَ | بٌ</a:t>
@@ -12992,6 +13076,7 @@
                   <a:srgbClr val="1F2A37"/>
                 </a:solidFill>
                 <a:latin typeface="Amiri" pitchFamily="2" charset="-78"/>
+                <a:ea typeface="Amiri" pitchFamily="2" charset="-78"/>
                 <a:cs typeface="Amiri" pitchFamily="2" charset="-78"/>
               </a:rPr>
               <a:t>مَكْ | تَ | بٌ</a:t>
@@ -13093,6 +13178,7 @@
                   <a:srgbClr val="1F2A37"/>
                 </a:solidFill>
                 <a:latin typeface="Amiri" pitchFamily="2" charset="-78"/>
+                <a:ea typeface="Amiri" pitchFamily="2" charset="-78"/>
                 <a:cs typeface="Amiri" pitchFamily="2" charset="-78"/>
               </a:rPr>
               <a:t>مَكْتَ | بٌ</a:t>
@@ -13266,6 +13352,7 @@
                   <a:srgbClr val="1B3B6F"/>
                 </a:solidFill>
                 <a:latin typeface="Amiri" pitchFamily="2" charset="-78"/>
+                <a:ea typeface="Amiri" pitchFamily="2" charset="-78"/>
                 <a:cs typeface="Amiri" pitchFamily="2" charset="-78"/>
               </a:rPr>
               <a:t>كِتَابٌ</a:t>
@@ -13367,6 +13454,7 @@
                   <a:srgbClr val="1F2A37"/>
                 </a:solidFill>
                 <a:latin typeface="Amiri" pitchFamily="2" charset="-78"/>
+                <a:ea typeface="Amiri" pitchFamily="2" charset="-78"/>
                 <a:cs typeface="Amiri" pitchFamily="2" charset="-78"/>
               </a:rPr>
               <a:t>كِتْ | ا | بٌ</a:t>
@@ -13468,6 +13556,7 @@
                   <a:srgbClr val="1F2A37"/>
                 </a:solidFill>
                 <a:latin typeface="Amiri" pitchFamily="2" charset="-78"/>
+                <a:ea typeface="Amiri" pitchFamily="2" charset="-78"/>
                 <a:cs typeface="Amiri" pitchFamily="2" charset="-78"/>
               </a:rPr>
               <a:t>كِ | تَ | ا | بٌ</a:t>
@@ -13569,6 +13658,7 @@
                   <a:srgbClr val="1F2A37"/>
                 </a:solidFill>
                 <a:latin typeface="Amiri" pitchFamily="2" charset="-78"/>
+                <a:ea typeface="Amiri" pitchFamily="2" charset="-78"/>
                 <a:cs typeface="Amiri" pitchFamily="2" charset="-78"/>
               </a:rPr>
               <a:t>كِ | تَا | بٌ</a:t>
@@ -13742,6 +13832,7 @@
                   <a:srgbClr val="1B3B6F"/>
                 </a:solidFill>
                 <a:latin typeface="Amiri" pitchFamily="2" charset="-78"/>
+                <a:ea typeface="Amiri" pitchFamily="2" charset="-78"/>
                 <a:cs typeface="Amiri" pitchFamily="2" charset="-78"/>
               </a:rPr>
               <a:t>مُعَلِّمٌ</a:t>
@@ -13843,6 +13934,7 @@
                   <a:srgbClr val="1F2A37"/>
                 </a:solidFill>
                 <a:latin typeface="Amiri" pitchFamily="2" charset="-78"/>
+                <a:ea typeface="Amiri" pitchFamily="2" charset="-78"/>
                 <a:cs typeface="Amiri" pitchFamily="2" charset="-78"/>
               </a:rPr>
               <a:t>مُ | عَلْ | لِ | مٌ</a:t>
@@ -13944,6 +14036,7 @@
                   <a:srgbClr val="1F2A37"/>
                 </a:solidFill>
                 <a:latin typeface="Amiri" pitchFamily="2" charset="-78"/>
+                <a:ea typeface="Amiri" pitchFamily="2" charset="-78"/>
                 <a:cs typeface="Amiri" pitchFamily="2" charset="-78"/>
               </a:rPr>
               <a:t>مُ | عَ | لِ | مٌ</a:t>
@@ -14045,6 +14138,7 @@
                   <a:srgbClr val="1F2A37"/>
                 </a:solidFill>
                 <a:latin typeface="Amiri" pitchFamily="2" charset="-78"/>
+                <a:ea typeface="Amiri" pitchFamily="2" charset="-78"/>
                 <a:cs typeface="Amiri" pitchFamily="2" charset="-78"/>
               </a:rPr>
               <a:t>مُعَ | لِمٌ</a:t>
@@ -14218,6 +14312,7 @@
                   <a:srgbClr val="1B3B6F"/>
                 </a:solidFill>
                 <a:latin typeface="Amiri" pitchFamily="2" charset="-78"/>
+                <a:ea typeface="Amiri" pitchFamily="2" charset="-78"/>
                 <a:cs typeface="Amiri" pitchFamily="2" charset="-78"/>
               </a:rPr>
               <a:t>يَقْرَأُ</a:t>
@@ -14319,6 +14414,7 @@
                   <a:srgbClr val="1F2A37"/>
                 </a:solidFill>
                 <a:latin typeface="Amiri" pitchFamily="2" charset="-78"/>
+                <a:ea typeface="Amiri" pitchFamily="2" charset="-78"/>
                 <a:cs typeface="Amiri" pitchFamily="2" charset="-78"/>
               </a:rPr>
               <a:t>يَ | قَ | رَ | أُ</a:t>
@@ -14420,6 +14516,7 @@
                   <a:srgbClr val="1F2A37"/>
                 </a:solidFill>
                 <a:latin typeface="Amiri" pitchFamily="2" charset="-78"/>
+                <a:ea typeface="Amiri" pitchFamily="2" charset="-78"/>
                 <a:cs typeface="Amiri" pitchFamily="2" charset="-78"/>
               </a:rPr>
               <a:t>يَقْ | رَ | أُ</a:t>
@@ -14521,6 +14618,7 @@
                   <a:srgbClr val="1F2A37"/>
                 </a:solidFill>
                 <a:latin typeface="Amiri" pitchFamily="2" charset="-78"/>
+                <a:ea typeface="Amiri" pitchFamily="2" charset="-78"/>
                 <a:cs typeface="Amiri" pitchFamily="2" charset="-78"/>
               </a:rPr>
               <a:t>يَقْرَ | أُ</a:t>
@@ -14694,6 +14792,7 @@
                   <a:srgbClr val="1B3B6F"/>
                 </a:solidFill>
                 <a:latin typeface="Amiri" pitchFamily="2" charset="-78"/>
+                <a:ea typeface="Amiri" pitchFamily="2" charset="-78"/>
                 <a:cs typeface="Amiri" pitchFamily="2" charset="-78"/>
               </a:rPr>
               <a:t>سِتَّةٌ</a:t>
@@ -14795,6 +14894,7 @@
                   <a:srgbClr val="1F2A37"/>
                 </a:solidFill>
                 <a:latin typeface="Amiri" pitchFamily="2" charset="-78"/>
+                <a:ea typeface="Amiri" pitchFamily="2" charset="-78"/>
                 <a:cs typeface="Amiri" pitchFamily="2" charset="-78"/>
               </a:rPr>
               <a:t>سِتْ | تَ | ةٌ</a:t>
@@ -14896,6 +14996,7 @@
                   <a:srgbClr val="1F2A37"/>
                 </a:solidFill>
                 <a:latin typeface="Amiri" pitchFamily="2" charset="-78"/>
+                <a:ea typeface="Amiri" pitchFamily="2" charset="-78"/>
                 <a:cs typeface="Amiri" pitchFamily="2" charset="-78"/>
               </a:rPr>
               <a:t>سِ | تَ | ةٌ</a:t>
@@ -14997,6 +15098,7 @@
                   <a:srgbClr val="1F2A37"/>
                 </a:solidFill>
                 <a:latin typeface="Amiri" pitchFamily="2" charset="-78"/>
+                <a:ea typeface="Amiri" pitchFamily="2" charset="-78"/>
                 <a:cs typeface="Amiri" pitchFamily="2" charset="-78"/>
               </a:rPr>
               <a:t>سِتَّ | ةٌ</a:t>
@@ -15299,6 +15401,7 @@
                   <a:srgbClr val="D4AF37"/>
                 </a:solidFill>
                 <a:latin typeface="Amiri" pitchFamily="2" charset="-78"/>
+                <a:ea typeface="Amiri" pitchFamily="2" charset="-78"/>
                 <a:cs typeface="Amiri" pitchFamily="2" charset="-78"/>
               </a:rPr>
               <a:t>م</a:t>
@@ -15619,6 +15722,7 @@
                   <a:srgbClr val="8A6D1E"/>
                 </a:solidFill>
                 <a:latin typeface="Amiri" pitchFamily="2" charset="-78"/>
+                <a:ea typeface="Amiri" pitchFamily="2" charset="-78"/>
                 <a:cs typeface="Amiri" pitchFamily="2" charset="-78"/>
               </a:rPr>
               <a:t>الإِجَابَاتُ</a:t>
@@ -15830,6 +15934,7 @@
                   <a:srgbClr val="1B3B6F"/>
                 </a:solidFill>
                 <a:latin typeface="Amiri" pitchFamily="2" charset="-78"/>
+                <a:ea typeface="Amiri" pitchFamily="2" charset="-78"/>
                 <a:cs typeface="Amiri" pitchFamily="2" charset="-78"/>
               </a:rPr>
               <a:t>مَكْتَبٌ</a:t>
@@ -15931,6 +16036,7 @@
                   <a:srgbClr val="9AA1AB"/>
                 </a:solidFill>
                 <a:latin typeface="Amiri" pitchFamily="2" charset="-78"/>
+                <a:ea typeface="Amiri" pitchFamily="2" charset="-78"/>
                 <a:cs typeface="Amiri" pitchFamily="2" charset="-78"/>
               </a:rPr>
               <a:t>مَ | كَ | تَ | بٌ</a:t>
@@ -16059,6 +16165,7 @@
                   <a:srgbClr val="1F2A37"/>
                 </a:solidFill>
                 <a:latin typeface="Amiri" pitchFamily="2" charset="-78"/>
+                <a:ea typeface="Amiri" pitchFamily="2" charset="-78"/>
                 <a:cs typeface="Amiri" pitchFamily="2" charset="-78"/>
               </a:rPr>
               <a:t>مَكْ | تَ | بٌ</a:t>
@@ -16160,6 +16267,7 @@
                   <a:srgbClr val="9AA1AB"/>
                 </a:solidFill>
                 <a:latin typeface="Amiri" pitchFamily="2" charset="-78"/>
+                <a:ea typeface="Amiri" pitchFamily="2" charset="-78"/>
                 <a:cs typeface="Amiri" pitchFamily="2" charset="-78"/>
               </a:rPr>
               <a:t>مَكْتَ | بٌ</a:t>
@@ -16211,6 +16319,7 @@
                   <a:srgbClr val="8A6D1E"/>
                 </a:solidFill>
                 <a:latin typeface="Amiri" pitchFamily="2" charset="-78"/>
+                <a:ea typeface="Amiri" pitchFamily="2" charset="-78"/>
                 <a:cs typeface="Amiri" pitchFamily="2" charset="-78"/>
               </a:rPr>
               <a:t>مَكْ</a:t>
@@ -16397,6 +16506,7 @@
                   <a:srgbClr val="1B3B6F"/>
                 </a:solidFill>
                 <a:latin typeface="Amiri" pitchFamily="2" charset="-78"/>
+                <a:ea typeface="Amiri" pitchFamily="2" charset="-78"/>
                 <a:cs typeface="Amiri" pitchFamily="2" charset="-78"/>
               </a:rPr>
               <a:t>كِتَابٌ</a:t>
@@ -16498,6 +16608,7 @@
                   <a:srgbClr val="9AA1AB"/>
                 </a:solidFill>
                 <a:latin typeface="Amiri" pitchFamily="2" charset="-78"/>
+                <a:ea typeface="Amiri" pitchFamily="2" charset="-78"/>
                 <a:cs typeface="Amiri" pitchFamily="2" charset="-78"/>
               </a:rPr>
               <a:t>كِتْ | ا | بٌ</a:t>
@@ -16599,6 +16710,7 @@
                   <a:srgbClr val="9AA1AB"/>
                 </a:solidFill>
                 <a:latin typeface="Amiri" pitchFamily="2" charset="-78"/>
+                <a:ea typeface="Amiri" pitchFamily="2" charset="-78"/>
                 <a:cs typeface="Amiri" pitchFamily="2" charset="-78"/>
               </a:rPr>
               <a:t>كِ | تَ | ا | بٌ</a:t>
@@ -16727,6 +16839,7 @@
                   <a:srgbClr val="1F2A37"/>
                 </a:solidFill>
                 <a:latin typeface="Amiri" pitchFamily="2" charset="-78"/>
+                <a:ea typeface="Amiri" pitchFamily="2" charset="-78"/>
                 <a:cs typeface="Amiri" pitchFamily="2" charset="-78"/>
               </a:rPr>
               <a:t>كِ | تَا | بٌ</a:t>
@@ -16778,6 +16891,7 @@
                   <a:srgbClr val="8A6D1E"/>
                 </a:solidFill>
                 <a:latin typeface="Amiri" pitchFamily="2" charset="-78"/>
+                <a:ea typeface="Amiri" pitchFamily="2" charset="-78"/>
                 <a:cs typeface="Amiri" pitchFamily="2" charset="-78"/>
               </a:rPr>
               <a:t>تَا</a:t>
@@ -16964,6 +17078,7 @@
                   <a:srgbClr val="1B3B6F"/>
                 </a:solidFill>
                 <a:latin typeface="Amiri" pitchFamily="2" charset="-78"/>
+                <a:ea typeface="Amiri" pitchFamily="2" charset="-78"/>
                 <a:cs typeface="Amiri" pitchFamily="2" charset="-78"/>
               </a:rPr>
               <a:t>مُعَلِّمٌ</a:t>
@@ -17092,6 +17207,7 @@
                   <a:srgbClr val="1F2A37"/>
                 </a:solidFill>
                 <a:latin typeface="Amiri" pitchFamily="2" charset="-78"/>
+                <a:ea typeface="Amiri" pitchFamily="2" charset="-78"/>
                 <a:cs typeface="Amiri" pitchFamily="2" charset="-78"/>
               </a:rPr>
               <a:t>مُ | عَلْ | لِ | مٌ</a:t>
@@ -17193,6 +17309,7 @@
                   <a:srgbClr val="9AA1AB"/>
                 </a:solidFill>
                 <a:latin typeface="Amiri" pitchFamily="2" charset="-78"/>
+                <a:ea typeface="Amiri" pitchFamily="2" charset="-78"/>
                 <a:cs typeface="Amiri" pitchFamily="2" charset="-78"/>
               </a:rPr>
               <a:t>مُ | عَ | لِ | مٌ</a:t>
@@ -17294,6 +17411,7 @@
                   <a:srgbClr val="9AA1AB"/>
                 </a:solidFill>
                 <a:latin typeface="Amiri" pitchFamily="2" charset="-78"/>
+                <a:ea typeface="Amiri" pitchFamily="2" charset="-78"/>
                 <a:cs typeface="Amiri" pitchFamily="2" charset="-78"/>
               </a:rPr>
               <a:t>مُعَ | لِمٌ</a:t>
@@ -17505,6 +17623,7 @@
                   <a:srgbClr val="1B3B6F"/>
                 </a:solidFill>
                 <a:latin typeface="Amiri" pitchFamily="2" charset="-78"/>
+                <a:ea typeface="Amiri" pitchFamily="2" charset="-78"/>
                 <a:cs typeface="Amiri" pitchFamily="2" charset="-78"/>
               </a:rPr>
               <a:t>يَقْرَأُ</a:t>
@@ -17606,6 +17725,7 @@
                   <a:srgbClr val="9AA1AB"/>
                 </a:solidFill>
                 <a:latin typeface="Amiri" pitchFamily="2" charset="-78"/>
+                <a:ea typeface="Amiri" pitchFamily="2" charset="-78"/>
                 <a:cs typeface="Amiri" pitchFamily="2" charset="-78"/>
               </a:rPr>
               <a:t>يَ | قَ | رَ | أُ</a:t>
@@ -17734,6 +17854,7 @@
                   <a:srgbClr val="1F2A37"/>
                 </a:solidFill>
                 <a:latin typeface="Amiri" pitchFamily="2" charset="-78"/>
+                <a:ea typeface="Amiri" pitchFamily="2" charset="-78"/>
                 <a:cs typeface="Amiri" pitchFamily="2" charset="-78"/>
               </a:rPr>
               <a:t>يَقْ | رَ | أُ</a:t>
@@ -17835,6 +17956,7 @@
                   <a:srgbClr val="9AA1AB"/>
                 </a:solidFill>
                 <a:latin typeface="Amiri" pitchFamily="2" charset="-78"/>
+                <a:ea typeface="Amiri" pitchFamily="2" charset="-78"/>
                 <a:cs typeface="Amiri" pitchFamily="2" charset="-78"/>
               </a:rPr>
               <a:t>يَقْرَ | أُ</a:t>
@@ -17886,6 +18008,7 @@
                   <a:srgbClr val="8A6D1E"/>
                 </a:solidFill>
                 <a:latin typeface="Amiri" pitchFamily="2" charset="-78"/>
+                <a:ea typeface="Amiri" pitchFamily="2" charset="-78"/>
                 <a:cs typeface="Amiri" pitchFamily="2" charset="-78"/>
               </a:rPr>
               <a:t>يَقْ</a:t>
@@ -18072,6 +18195,7 @@
                   <a:srgbClr val="1B3B6F"/>
                 </a:solidFill>
                 <a:latin typeface="Amiri" pitchFamily="2" charset="-78"/>
+                <a:ea typeface="Amiri" pitchFamily="2" charset="-78"/>
                 <a:cs typeface="Amiri" pitchFamily="2" charset="-78"/>
               </a:rPr>
               <a:t>سِتَّةٌ</a:t>
@@ -18200,6 +18324,7 @@
                   <a:srgbClr val="1F2A37"/>
                 </a:solidFill>
                 <a:latin typeface="Amiri" pitchFamily="2" charset="-78"/>
+                <a:ea typeface="Amiri" pitchFamily="2" charset="-78"/>
                 <a:cs typeface="Amiri" pitchFamily="2" charset="-78"/>
               </a:rPr>
               <a:t>سِتْ | تَ | ةٌ</a:t>
@@ -18301,6 +18426,7 @@
                   <a:srgbClr val="9AA1AB"/>
                 </a:solidFill>
                 <a:latin typeface="Amiri" pitchFamily="2" charset="-78"/>
+                <a:ea typeface="Amiri" pitchFamily="2" charset="-78"/>
                 <a:cs typeface="Amiri" pitchFamily="2" charset="-78"/>
               </a:rPr>
               <a:t>سِ | تَ | ةٌ</a:t>
@@ -18402,6 +18528,7 @@
                   <a:srgbClr val="9AA1AB"/>
                 </a:solidFill>
                 <a:latin typeface="Amiri" pitchFamily="2" charset="-78"/>
+                <a:ea typeface="Amiri" pitchFamily="2" charset="-78"/>
                 <a:cs typeface="Amiri" pitchFamily="2" charset="-78"/>
               </a:rPr>
               <a:t>سِتَّ | ةٌ</a:t>
@@ -18742,6 +18869,7 @@
                   <a:srgbClr val="D4AF37"/>
                 </a:solidFill>
                 <a:latin typeface="Amiri" pitchFamily="2" charset="-78"/>
+                <a:ea typeface="Amiri" pitchFamily="2" charset="-78"/>
                 <a:cs typeface="Amiri" pitchFamily="2" charset="-78"/>
               </a:rPr>
               <a:t>م</a:t>
@@ -19062,6 +19190,7 @@
                   <a:srgbClr val="8A6D1E"/>
                 </a:solidFill>
                 <a:latin typeface="Amiri" pitchFamily="2" charset="-78"/>
+                <a:ea typeface="Amiri" pitchFamily="2" charset="-78"/>
                 <a:cs typeface="Amiri" pitchFamily="2" charset="-78"/>
               </a:rPr>
               <a:t>شَرِيطُ القِرَاءَةِ ٢</a:t>
@@ -19165,6 +19294,7 @@
                   <a:srgbClr val="1B3B6F"/>
                 </a:solidFill>
                 <a:latin typeface="Amiri" pitchFamily="2" charset="-78"/>
+                <a:ea typeface="Amiri" pitchFamily="2" charset="-78"/>
                 <a:cs typeface="Amiri" pitchFamily="2" charset="-78"/>
               </a:rPr>
               <a:t>هُوَ يَقْرَأُ  ·  هِيَ تَكْتُبُ</a:t>
@@ -19268,6 +19398,7 @@
                   <a:srgbClr val="1B3B6F"/>
                 </a:solidFill>
                 <a:latin typeface="Amiri" pitchFamily="2" charset="-78"/>
+                <a:ea typeface="Amiri" pitchFamily="2" charset="-78"/>
                 <a:cs typeface="Amiri" pitchFamily="2" charset="-78"/>
               </a:rPr>
               <a:t>أَنَا أَفْهَمُ  ·  لَا أَفْهَمُ</a:t>
@@ -19371,6 +19502,7 @@
                   <a:srgbClr val="1B3B6F"/>
                 </a:solidFill>
                 <a:latin typeface="Amiri" pitchFamily="2" charset="-78"/>
+                <a:ea typeface="Amiri" pitchFamily="2" charset="-78"/>
                 <a:cs typeface="Amiri" pitchFamily="2" charset="-78"/>
               </a:rPr>
               <a:t>قَرَأَ كِتَابًا</a:t>
@@ -19474,6 +19606,7 @@
                   <a:srgbClr val="1B3B6F"/>
                 </a:solidFill>
                 <a:latin typeface="Amiri" pitchFamily="2" charset="-78"/>
+                <a:ea typeface="Amiri" pitchFamily="2" charset="-78"/>
                 <a:cs typeface="Amiri" pitchFamily="2" charset="-78"/>
               </a:rPr>
               <a:t>ذَهَبَ إِلَى البَيْتِ</a:t>
@@ -19577,6 +19710,7 @@
                   <a:srgbClr val="1B3B6F"/>
                 </a:solidFill>
                 <a:latin typeface="Amiri" pitchFamily="2" charset="-78"/>
+                <a:ea typeface="Amiri" pitchFamily="2" charset="-78"/>
                 <a:cs typeface="Amiri" pitchFamily="2" charset="-78"/>
               </a:rPr>
               <a:t>جَلَسَ فِي الفَصْلِ  ·  مَعَ مُحَمَّدٍ</a:t>
@@ -19748,6 +19882,7 @@
                   <a:srgbClr val="D4AF37"/>
                 </a:solidFill>
                 <a:latin typeface="Amiri" pitchFamily="2" charset="-78"/>
+                <a:ea typeface="Amiri" pitchFamily="2" charset="-78"/>
                 <a:cs typeface="Amiri" pitchFamily="2" charset="-78"/>
               </a:rPr>
               <a:t>م</a:t>
@@ -20133,6 +20268,7 @@
                   <a:srgbClr val="8A6D1E"/>
                 </a:solidFill>
                 <a:latin typeface="Amiri" pitchFamily="2" charset="-78"/>
+                <a:ea typeface="Amiri" pitchFamily="2" charset="-78"/>
                 <a:cs typeface="Amiri" pitchFamily="2" charset="-78"/>
               </a:rPr>
               <a:t>شَرِيطُ القِرَاءَةِ ٣</a:t>
@@ -20236,6 +20372,7 @@
                   <a:srgbClr val="1B3B6F"/>
                 </a:solidFill>
                 <a:latin typeface="Amiri" pitchFamily="2" charset="-78"/>
+                <a:ea typeface="Amiri" pitchFamily="2" charset="-78"/>
                 <a:cs typeface="Amiri" pitchFamily="2" charset="-78"/>
               </a:rPr>
               <a:t>قَرَأَتْ مَرْيَمُ | كِتَابًا قَصِيرًا.</a:t>
@@ -20339,6 +20476,7 @@
                   <a:srgbClr val="1B3B6F"/>
                 </a:solidFill>
                 <a:latin typeface="Amiri" pitchFamily="2" charset="-78"/>
+                <a:ea typeface="Amiri" pitchFamily="2" charset="-78"/>
                 <a:cs typeface="Amiri" pitchFamily="2" charset="-78"/>
               </a:rPr>
               <a:t>ذَهَبَ سَامِرٌ | إِلَى المَدْرَسَةِ.</a:t>
@@ -20442,6 +20580,7 @@
                   <a:srgbClr val="1B3B6F"/>
                 </a:solidFill>
                 <a:latin typeface="Amiri" pitchFamily="2" charset="-78"/>
+                <a:ea typeface="Amiri" pitchFamily="2" charset="-78"/>
                 <a:cs typeface="Amiri" pitchFamily="2" charset="-78"/>
               </a:rPr>
               <a:t>كَتَبَتْ لَيْلَى | دَرْسًا | فِي دَفْتَرِهَا.</a:t>
@@ -20545,6 +20684,7 @@
                   <a:srgbClr val="1B3B6F"/>
                 </a:solidFill>
                 <a:latin typeface="Amiri" pitchFamily="2" charset="-78"/>
+                <a:ea typeface="Amiri" pitchFamily="2" charset="-78"/>
                 <a:cs typeface="Amiri" pitchFamily="2" charset="-78"/>
               </a:rPr>
               <a:t>شَرِبَ أَحْمَدُ | مَاءً | بَعْدَ الرِّيَاضَةِ.</a:t>
@@ -20716,6 +20856,7 @@
                   <a:srgbClr val="D4AF37"/>
                 </a:solidFill>
                 <a:latin typeface="Amiri" pitchFamily="2" charset="-78"/>
+                <a:ea typeface="Amiri" pitchFamily="2" charset="-78"/>
                 <a:cs typeface="Amiri" pitchFamily="2" charset="-78"/>
               </a:rPr>
               <a:t>م</a:t>
@@ -21036,6 +21177,7 @@
                   <a:srgbClr val="8A6D1E"/>
                 </a:solidFill>
                 <a:latin typeface="Amiri" pitchFamily="2" charset="-78"/>
+                <a:ea typeface="Amiri" pitchFamily="2" charset="-78"/>
                 <a:cs typeface="Amiri" pitchFamily="2" charset="-78"/>
               </a:rPr>
               <a:t>اِقْرَأْ</a:t>
@@ -21211,6 +21353,7 @@
                   <a:srgbClr val="2E8B57"/>
                 </a:solidFill>
                 <a:latin typeface="Amiri" pitchFamily="2" charset="-78"/>
+                <a:ea typeface="Amiri" pitchFamily="2" charset="-78"/>
                 <a:cs typeface="Amiri" pitchFamily="2" charset="-78"/>
               </a:rPr>
               <a:t>الأَسَاسُ</a:t>
@@ -21505,6 +21648,7 @@
                   <a:srgbClr val="C9780A"/>
                 </a:solidFill>
                 <a:latin typeface="Amiri" pitchFamily="2" charset="-78"/>
+                <a:ea typeface="Amiri" pitchFamily="2" charset="-78"/>
                 <a:cs typeface="Amiri" pitchFamily="2" charset="-78"/>
               </a:rPr>
               <a:t>التَّطْوِيرُ</a:t>
@@ -21799,6 +21943,7 @@
                   <a:srgbClr val="B83227"/>
                 </a:solidFill>
                 <a:latin typeface="Amiri" pitchFamily="2" charset="-78"/>
+                <a:ea typeface="Amiri" pitchFamily="2" charset="-78"/>
                 <a:cs typeface="Amiri" pitchFamily="2" charset="-78"/>
               </a:rPr>
               <a:t>التَّحَدِّي</a:t>
@@ -22089,6 +22234,7 @@
                   <a:srgbClr val="D4AF37"/>
                 </a:solidFill>
                 <a:latin typeface="Amiri" pitchFamily="2" charset="-78"/>
+                <a:ea typeface="Amiri" pitchFamily="2" charset="-78"/>
                 <a:cs typeface="Amiri" pitchFamily="2" charset="-78"/>
               </a:rPr>
               <a:t>م</a:t>
@@ -22409,6 +22555,7 @@
                   <a:srgbClr val="8A6D1E"/>
                 </a:solidFill>
                 <a:latin typeface="Amiri" pitchFamily="2" charset="-78"/>
+                <a:ea typeface="Amiri" pitchFamily="2" charset="-78"/>
                 <a:cs typeface="Amiri" pitchFamily="2" charset="-78"/>
               </a:rPr>
               <a:t>آدَابُ الصَّفِّ</a:t>
@@ -23940,6 +24087,7 @@
                   <a:srgbClr val="D4AF37"/>
                 </a:solidFill>
                 <a:latin typeface="Amiri" pitchFamily="2" charset="-78"/>
+                <a:ea typeface="Amiri" pitchFamily="2" charset="-78"/>
                 <a:cs typeface="Amiri" pitchFamily="2" charset="-78"/>
               </a:rPr>
               <a:t>م</a:t>
@@ -24260,6 +24408,7 @@
                   <a:srgbClr val="8A6D1E"/>
                 </a:solidFill>
                 <a:latin typeface="Amiri" pitchFamily="2" charset="-78"/>
+                <a:ea typeface="Amiri" pitchFamily="2" charset="-78"/>
                 <a:cs typeface="Amiri" pitchFamily="2" charset="-78"/>
               </a:rPr>
               <a:t>التَّحَدُّثُ</a:t>
@@ -25030,6 +25179,7 @@
                   <a:srgbClr val="1B3B6F"/>
                 </a:solidFill>
                 <a:latin typeface="Amiri" pitchFamily="2" charset="-78"/>
+                <a:ea typeface="Amiri" pitchFamily="2" charset="-78"/>
                 <a:cs typeface="Amiri" pitchFamily="2" charset="-78"/>
               </a:rPr>
               <a:t>اِقْرَأْ: كَتَبَ</a:t>
@@ -25167,6 +25317,7 @@
                   <a:srgbClr val="1B3B6F"/>
                 </a:solidFill>
                 <a:latin typeface="Amiri" pitchFamily="2" charset="-78"/>
+                <a:ea typeface="Amiri" pitchFamily="2" charset="-78"/>
                 <a:cs typeface="Amiri" pitchFamily="2" charset="-78"/>
               </a:rPr>
               <a:t>اِقْرَأْ: مَكْتَبٌ</a:t>
@@ -25304,6 +25455,7 @@
                   <a:srgbClr val="1B3B6F"/>
                 </a:solidFill>
                 <a:latin typeface="Amiri" pitchFamily="2" charset="-78"/>
+                <a:ea typeface="Amiri" pitchFamily="2" charset="-78"/>
                 <a:cs typeface="Amiri" pitchFamily="2" charset="-78"/>
               </a:rPr>
               <a:t>اِقْرَأْ: مُعَلِّمٌ</a:t>
@@ -25441,6 +25593,7 @@
                   <a:srgbClr val="1B3B6F"/>
                 </a:solidFill>
                 <a:latin typeface="Amiri" pitchFamily="2" charset="-78"/>
+                <a:ea typeface="Amiri" pitchFamily="2" charset="-78"/>
                 <a:cs typeface="Amiri" pitchFamily="2" charset="-78"/>
               </a:rPr>
               <a:t>اِقْرَأِ الجُمْلَةَ.</a:t>
@@ -25616,6 +25769,7 @@
                   <a:srgbClr val="1D5FBF"/>
                 </a:solidFill>
                 <a:latin typeface="Amiri" pitchFamily="2" charset="-78"/>
+                <a:ea typeface="Amiri" pitchFamily="2" charset="-78"/>
                 <a:cs typeface="Amiri" pitchFamily="2" charset="-78"/>
               </a:rPr>
               <a:t>صَحِيحٌ !</a:t>
@@ -25719,6 +25873,7 @@
                   <a:srgbClr val="1F2A37"/>
                 </a:solidFill>
                 <a:latin typeface="Amiri" pitchFamily="2" charset="-78"/>
+                <a:ea typeface="Amiri" pitchFamily="2" charset="-78"/>
                 <a:cs typeface="Amiri" pitchFamily="2" charset="-78"/>
               </a:rPr>
               <a:t>هَلْ أُعِيدُ؟</a:t>
@@ -25822,6 +25977,7 @@
                   <a:srgbClr val="1F2A37"/>
                 </a:solidFill>
                 <a:latin typeface="Amiri" pitchFamily="2" charset="-78"/>
+                <a:ea typeface="Amiri" pitchFamily="2" charset="-78"/>
                 <a:cs typeface="Amiri" pitchFamily="2" charset="-78"/>
               </a:rPr>
               <a:t>لَا أَفْهَمُ .</a:t>
@@ -25925,6 +26081,7 @@
                   <a:srgbClr val="1F2A37"/>
                 </a:solidFill>
                 <a:latin typeface="Amiri" pitchFamily="2" charset="-78"/>
+                <a:ea typeface="Amiri" pitchFamily="2" charset="-78"/>
                 <a:cs typeface="Amiri" pitchFamily="2" charset="-78"/>
               </a:rPr>
               <a:t>قَرَأَ / قَرَأَتْ ___ .</a:t>
@@ -26098,6 +26255,7 @@
                   <a:srgbClr val="1F2A37"/>
                 </a:solidFill>
                 <a:latin typeface="Amiri" pitchFamily="2" charset="-78"/>
+                <a:ea typeface="Amiri" pitchFamily="2" charset="-78"/>
                 <a:cs typeface="Amiri" pitchFamily="2" charset="-78"/>
               </a:rPr>
               <a:t>اِقْرَأْ: مُعَلِّمٌ</a:t>
@@ -26237,6 +26395,7 @@
                   <a:srgbClr val="1F2A37"/>
                 </a:solidFill>
                 <a:latin typeface="Amiri" pitchFamily="2" charset="-78"/>
+                <a:ea typeface="Amiri" pitchFamily="2" charset="-78"/>
                 <a:cs typeface="Amiri" pitchFamily="2" charset="-78"/>
               </a:rPr>
               <a:t>مُعَلِّمٌ.</a:t>
@@ -26408,6 +26567,7 @@
                   <a:srgbClr val="D4AF37"/>
                 </a:solidFill>
                 <a:latin typeface="Amiri" pitchFamily="2" charset="-78"/>
+                <a:ea typeface="Amiri" pitchFamily="2" charset="-78"/>
                 <a:cs typeface="Amiri" pitchFamily="2" charset="-78"/>
               </a:rPr>
               <a:t>م</a:t>
@@ -26728,6 +26888,7 @@
                   <a:srgbClr val="8A6D1E"/>
                 </a:solidFill>
                 <a:latin typeface="Amiri" pitchFamily="2" charset="-78"/>
+                <a:ea typeface="Amiri" pitchFamily="2" charset="-78"/>
                 <a:cs typeface="Amiri" pitchFamily="2" charset="-78"/>
               </a:rPr>
               <a:t>تَقْيِيمُ الزَّمِيلِ</a:t>
@@ -27862,6 +28023,7 @@
                   <a:srgbClr val="D4AF37"/>
                 </a:solidFill>
                 <a:latin typeface="Amiri" pitchFamily="2" charset="-78"/>
+                <a:ea typeface="Amiri" pitchFamily="2" charset="-78"/>
                 <a:cs typeface="Amiri" pitchFamily="2" charset="-78"/>
               </a:rPr>
               <a:t>م</a:t>
@@ -28182,6 +28344,7 @@
                   <a:srgbClr val="8A6D1E"/>
                 </a:solidFill>
                 <a:latin typeface="Amiri" pitchFamily="2" charset="-78"/>
+                <a:ea typeface="Amiri" pitchFamily="2" charset="-78"/>
                 <a:cs typeface="Amiri" pitchFamily="2" charset="-78"/>
               </a:rPr>
               <a:t>قَيِّمْ عَمَلَكَ</a:t>
@@ -29339,6 +29502,7 @@
                   <a:srgbClr val="D4AF37"/>
                 </a:solidFill>
                 <a:latin typeface="Amiri" pitchFamily="2" charset="-78"/>
+                <a:ea typeface="Amiri" pitchFamily="2" charset="-78"/>
                 <a:cs typeface="Amiri" pitchFamily="2" charset="-78"/>
               </a:rPr>
               <a:t>م</a:t>
@@ -29659,6 +29823,7 @@
                   <a:srgbClr val="8A6D1E"/>
                 </a:solidFill>
                 <a:latin typeface="Amiri" pitchFamily="2" charset="-78"/>
+                <a:ea typeface="Amiri" pitchFamily="2" charset="-78"/>
                 <a:cs typeface="Amiri" pitchFamily="2" charset="-78"/>
               </a:rPr>
               <a:t>تَذْكِرَةُ الخُرُوجِ</a:t>
@@ -31052,6 +31217,7 @@
                   <a:srgbClr val="D4AF37"/>
                 </a:solidFill>
                 <a:latin typeface="Amiri" pitchFamily="2" charset="-78"/>
+                <a:ea typeface="Amiri" pitchFamily="2" charset="-78"/>
                 <a:cs typeface="Amiri" pitchFamily="2" charset="-78"/>
               </a:rPr>
               <a:t>م</a:t>
@@ -31372,6 +31538,7 @@
                   <a:srgbClr val="8A6D1E"/>
                 </a:solidFill>
                 <a:latin typeface="Amiri" pitchFamily="2" charset="-78"/>
+                <a:ea typeface="Amiri" pitchFamily="2" charset="-78"/>
                 <a:cs typeface="Amiri" pitchFamily="2" charset="-78"/>
               </a:rPr>
               <a:t>إِجَابَاتُ تَذْكِرَةِ الخُرُوجِ</a:t>
@@ -32960,6 +33127,7 @@
                   <a:srgbClr val="D4AF37"/>
                 </a:solidFill>
                 <a:latin typeface="Amiri" pitchFamily="2" charset="-78"/>
+                <a:ea typeface="Amiri" pitchFamily="2" charset="-78"/>
                 <a:cs typeface="Amiri" pitchFamily="2" charset="-78"/>
               </a:rPr>
               <a:t>م</a:t>
@@ -33280,6 +33448,7 @@
                   <a:srgbClr val="8A6D1E"/>
                 </a:solidFill>
                 <a:latin typeface="Amiri" pitchFamily="2" charset="-78"/>
+                <a:ea typeface="Amiri" pitchFamily="2" charset="-78"/>
                 <a:cs typeface="Amiri" pitchFamily="2" charset="-78"/>
               </a:rPr>
               <a:t>التَّحْضِيرُ لِلدَّرْسِ القَادِمِ</a:t>
@@ -33493,6 +33662,7 @@
                   <a:srgbClr val="1B3B6F"/>
                 </a:solidFill>
                 <a:latin typeface="Amiri" pitchFamily="2" charset="-78"/>
+                <a:ea typeface="Amiri" pitchFamily="2" charset="-78"/>
                 <a:cs typeface="Amiri" pitchFamily="2" charset="-78"/>
               </a:rPr>
               <a:t>خَطٌّ</a:t>
@@ -33572,6 +33742,7 @@
                   <a:srgbClr val="1B3B6F"/>
                 </a:solidFill>
                 <a:latin typeface="Amiri" pitchFamily="2" charset="-78"/>
+                <a:ea typeface="Amiri" pitchFamily="2" charset="-78"/>
                 <a:cs typeface="Amiri" pitchFamily="2" charset="-78"/>
               </a:rPr>
               <a:t>سَطْرٌ</a:t>
@@ -33618,11 +33789,12 @@
               <a:buNone/>
             </a:pPr>
             <a:r>
-              <a:rPr lang="en-US" sz="1000" i="1" dirty="0">
+              <a:rPr lang="ar-SA" sz="1000" i="1" dirty="0">
                 <a:solidFill>
                   <a:srgbClr val="5A6472"/>
                 </a:solidFill>
                 <a:latin typeface="Calibri" pitchFamily="34" charset="0"/>
+                <a:ea typeface="Amiri" pitchFamily="2" charset="-78"/>
                 <a:cs typeface="Amiri" pitchFamily="2" charset="-78"/>
               </a:rPr>
               <a:t>  pl. أَسْطُرٌ</a:t>
@@ -33661,6 +33833,7 @@
                   <a:srgbClr val="1B3B6F"/>
                 </a:solidFill>
                 <a:latin typeface="Amiri" pitchFamily="2" charset="-78"/>
+                <a:ea typeface="Amiri" pitchFamily="2" charset="-78"/>
                 <a:cs typeface="Amiri" pitchFamily="2" charset="-78"/>
               </a:rPr>
               <a:t>إِمْلَاءٌ</a:t>
@@ -33740,6 +33913,7 @@
                   <a:srgbClr val="1B3B6F"/>
                 </a:solidFill>
                 <a:latin typeface="Amiri" pitchFamily="2" charset="-78"/>
+                <a:ea typeface="Amiri" pitchFamily="2" charset="-78"/>
                 <a:cs typeface="Amiri" pitchFamily="2" charset="-78"/>
               </a:rPr>
               <a:t>دَفْتَرٌ</a:t>
@@ -33786,11 +33960,12 @@
               <a:buNone/>
             </a:pPr>
             <a:r>
-              <a:rPr lang="en-US" sz="1000" i="1" dirty="0">
+              <a:rPr lang="ar-SA" sz="1000" i="1" dirty="0">
                 <a:solidFill>
                   <a:srgbClr val="5A6472"/>
                 </a:solidFill>
                 <a:latin typeface="Calibri" pitchFamily="34" charset="0"/>
+                <a:ea typeface="Amiri" pitchFamily="2" charset="-78"/>
                 <a:cs typeface="Amiri" pitchFamily="2" charset="-78"/>
               </a:rPr>
               <a:t>  pl. دَفَاتِرُ</a:t>
@@ -33829,6 +34004,7 @@
                   <a:srgbClr val="1B3B6F"/>
                 </a:solidFill>
                 <a:latin typeface="Amiri" pitchFamily="2" charset="-78"/>
+                <a:ea typeface="Amiri" pitchFamily="2" charset="-78"/>
                 <a:cs typeface="Amiri" pitchFamily="2" charset="-78"/>
               </a:rPr>
               <a:t>قَلَمٌ</a:t>
@@ -33875,11 +34051,12 @@
               <a:buNone/>
             </a:pPr>
             <a:r>
-              <a:rPr lang="en-US" sz="1000" i="1" dirty="0">
+              <a:rPr lang="ar-SA" sz="1000" i="1" dirty="0">
                 <a:solidFill>
                   <a:srgbClr val="5A6472"/>
                 </a:solidFill>
                 <a:latin typeface="Calibri" pitchFamily="34" charset="0"/>
+                <a:ea typeface="Amiri" pitchFamily="2" charset="-78"/>
                 <a:cs typeface="Amiri" pitchFamily="2" charset="-78"/>
               </a:rPr>
               <a:t>  pl. أَقْلَامٌ</a:t>
@@ -33994,6 +34171,7 @@
                   <a:srgbClr val="1B3B6F"/>
                 </a:solidFill>
                 <a:latin typeface="Amiri" pitchFamily="2" charset="-78"/>
+                <a:ea typeface="Amiri" pitchFamily="2" charset="-78"/>
                 <a:cs typeface="Amiri" pitchFamily="2" charset="-78"/>
               </a:rPr>
               <a:t>حَرْفٌ · عَلَامَةٌ · تَقْطِيعٌ · وَقْفٌ</a:t>
@@ -34663,6 +34841,7 @@
                   <a:srgbClr val="FFFFFF"/>
                 </a:solidFill>
                 <a:latin typeface="Amiri" pitchFamily="2" charset="-78"/>
+                <a:ea typeface="Amiri" pitchFamily="2" charset="-78"/>
                 <a:cs typeface="Amiri" pitchFamily="2" charset="-78"/>
               </a:rPr>
               <a:t>أَحْسَنْتُمْ! إِلَى اللِّقَاءِ</a:t>
@@ -34815,6 +34994,7 @@
                   <a:srgbClr val="D4AF37"/>
                 </a:solidFill>
                 <a:latin typeface="Amiri" pitchFamily="2" charset="-78"/>
+                <a:ea typeface="Amiri" pitchFamily="2" charset="-78"/>
                 <a:cs typeface="Amiri" pitchFamily="2" charset="-78"/>
               </a:rPr>
               <a:t>التَّدْرِيبُ عَلَى الكِتَابَةِ</a:t>
@@ -34948,6 +35128,7 @@
                   <a:srgbClr val="D4AF37"/>
                 </a:solidFill>
                 <a:latin typeface="Amiri" pitchFamily="2" charset="-78"/>
+                <a:ea typeface="Amiri" pitchFamily="2" charset="-78"/>
                 <a:cs typeface="Amiri" pitchFamily="2" charset="-78"/>
               </a:rPr>
               <a:t>م</a:t>
@@ -35268,6 +35449,7 @@
                   <a:srgbClr val="8A6D1E"/>
                 </a:solidFill>
                 <a:latin typeface="Amiri" pitchFamily="2" charset="-78"/>
+                <a:ea typeface="Amiri" pitchFamily="2" charset="-78"/>
                 <a:cs typeface="Amiri" pitchFamily="2" charset="-78"/>
               </a:rPr>
               <a:t>خَرِيطَةُ الدَّرْسِ</a:t>
@@ -35582,6 +35764,7 @@
                   <a:srgbClr val="0E7C86"/>
                 </a:solidFill>
                 <a:latin typeface="Amiri" pitchFamily="2" charset="-78"/>
+                <a:ea typeface="Amiri" pitchFamily="2" charset="-78"/>
                 <a:cs typeface="Amiri" pitchFamily="2" charset="-78"/>
               </a:rPr>
               <a:t>اِبْدَأِ الآنَ</a:t>
@@ -35858,6 +36041,7 @@
                   <a:srgbClr val="1B3B6F"/>
                 </a:solidFill>
                 <a:latin typeface="Amiri" pitchFamily="2" charset="-78"/>
+                <a:ea typeface="Amiri" pitchFamily="2" charset="-78"/>
                 <a:cs typeface="Amiri" pitchFamily="2" charset="-78"/>
               </a:rPr>
               <a:t>كَلِمَاتٌ وَقَوَاعِدُ</a:t>
@@ -36134,6 +36318,7 @@
                   <a:srgbClr val="6B4C9A"/>
                 </a:solidFill>
                 <a:latin typeface="Amiri" pitchFamily="2" charset="-78"/>
+                <a:ea typeface="Amiri" pitchFamily="2" charset="-78"/>
                 <a:cs typeface="Amiri" pitchFamily="2" charset="-78"/>
               </a:rPr>
               <a:t>شَاهِدْ</a:t>
@@ -36410,6 +36595,7 @@
                   <a:srgbClr val="2F6FB0"/>
                 </a:solidFill>
                 <a:latin typeface="Amiri" pitchFamily="2" charset="-78"/>
+                <a:ea typeface="Amiri" pitchFamily="2" charset="-78"/>
                 <a:cs typeface="Amiri" pitchFamily="2" charset="-78"/>
               </a:rPr>
               <a:t>مَعًا</a:t>
@@ -36686,6 +36872,7 @@
                   <a:srgbClr val="1E6B52"/>
                 </a:solidFill>
                 <a:latin typeface="Amiri" pitchFamily="2" charset="-78"/>
+                <a:ea typeface="Amiri" pitchFamily="2" charset="-78"/>
                 <a:cs typeface="Amiri" pitchFamily="2" charset="-78"/>
               </a:rPr>
               <a:t>وَحْدَكَ</a:t>
@@ -36962,6 +37149,7 @@
                   <a:srgbClr val="8A6D1E"/>
                 </a:solidFill>
                 <a:latin typeface="Amiri" pitchFamily="2" charset="-78"/>
+                <a:ea typeface="Amiri" pitchFamily="2" charset="-78"/>
                 <a:cs typeface="Amiri" pitchFamily="2" charset="-78"/>
               </a:rPr>
               <a:t>قَيِّمْ عَمَلَكَ</a:t>
@@ -37238,6 +37426,7 @@
                   <a:srgbClr val="C45A3C"/>
                 </a:solidFill>
                 <a:latin typeface="Amiri" pitchFamily="2" charset="-78"/>
+                <a:ea typeface="Amiri" pitchFamily="2" charset="-78"/>
                 <a:cs typeface="Amiri" pitchFamily="2" charset="-78"/>
               </a:rPr>
               <a:t>اِسْتَعِدَّ</a:t>
@@ -37481,6 +37670,7 @@
                   <a:srgbClr val="D4AF37"/>
                 </a:solidFill>
                 <a:latin typeface="Amiri" pitchFamily="2" charset="-78"/>
+                <a:ea typeface="Amiri" pitchFamily="2" charset="-78"/>
                 <a:cs typeface="Amiri" pitchFamily="2" charset="-78"/>
               </a:rPr>
               <a:t>م</a:t>
@@ -37801,6 +37991,7 @@
                   <a:srgbClr val="8A6D1E"/>
                 </a:solidFill>
                 <a:latin typeface="Amiri" pitchFamily="2" charset="-78"/>
+                <a:ea typeface="Amiri" pitchFamily="2" charset="-78"/>
                 <a:cs typeface="Amiri" pitchFamily="2" charset="-78"/>
               </a:rPr>
               <a:t>اِبْدَأِ الآنَ</a:t>
@@ -38075,6 +38266,7 @@
                   <a:srgbClr val="1F2A37"/>
                 </a:solidFill>
                 <a:latin typeface="Amiri" pitchFamily="2" charset="-78"/>
+                <a:ea typeface="Amiri" pitchFamily="2" charset="-78"/>
                 <a:cs typeface="Amiri" pitchFamily="2" charset="-78"/>
               </a:rPr>
               <a:t>٨</a:t>
@@ -38176,6 +38368,7 @@
                   <a:srgbClr val="1F2A37"/>
                 </a:solidFill>
                 <a:latin typeface="Amiri" pitchFamily="2" charset="-78"/>
+                <a:ea typeface="Amiri" pitchFamily="2" charset="-78"/>
                 <a:cs typeface="Amiri" pitchFamily="2" charset="-78"/>
               </a:rPr>
               <a:t>٧</a:t>
@@ -38277,6 +38470,7 @@
                   <a:srgbClr val="1F2A37"/>
                 </a:solidFill>
                 <a:latin typeface="Amiri" pitchFamily="2" charset="-78"/>
+                <a:ea typeface="Amiri" pitchFamily="2" charset="-78"/>
                 <a:cs typeface="Amiri" pitchFamily="2" charset="-78"/>
               </a:rPr>
               <a:t>٦</a:t>
@@ -38425,6 +38619,7 @@
                   <a:srgbClr val="1B3B6F"/>
                 </a:solidFill>
                 <a:latin typeface="Amiri" pitchFamily="2" charset="-78"/>
+                <a:ea typeface="Amiri" pitchFamily="2" charset="-78"/>
                 <a:cs typeface="Amiri" pitchFamily="2" charset="-78"/>
               </a:rPr>
               <a:t>١٥</a:t>
@@ -38977,6 +39172,7 @@
                   <a:srgbClr val="1F2A37"/>
                 </a:solidFill>
                 <a:latin typeface="Amiri" pitchFamily="2" charset="-78"/>
+                <a:ea typeface="Amiri" pitchFamily="2" charset="-78"/>
                 <a:cs typeface="Amiri" pitchFamily="2" charset="-78"/>
               </a:rPr>
               <a:t>عِشْرُونَ</a:t>
@@ -39078,6 +39274,7 @@
                   <a:srgbClr val="1F2A37"/>
                 </a:solidFill>
                 <a:latin typeface="Amiri" pitchFamily="2" charset="-78"/>
+                <a:ea typeface="Amiri" pitchFamily="2" charset="-78"/>
                 <a:cs typeface="Amiri" pitchFamily="2" charset="-78"/>
               </a:rPr>
               <a:t>وَاحِدٌ</a:t>
@@ -39179,6 +39376,7 @@
                   <a:srgbClr val="1F2A37"/>
                 </a:solidFill>
                 <a:latin typeface="Amiri" pitchFamily="2" charset="-78"/>
+                <a:ea typeface="Amiri" pitchFamily="2" charset="-78"/>
                 <a:cs typeface="Amiri" pitchFamily="2" charset="-78"/>
               </a:rPr>
               <a:t>عَشَرَةٌ</a:t>
@@ -39415,6 +39613,7 @@
                   <a:srgbClr val="1F2A37"/>
                 </a:solidFill>
                 <a:latin typeface="Amiri" pitchFamily="2" charset="-78"/>
+                <a:ea typeface="Amiri" pitchFamily="2" charset="-78"/>
                 <a:cs typeface="Amiri" pitchFamily="2" charset="-78"/>
               </a:rPr>
               <a:t>قَرَأَ</a:t>
@@ -39516,6 +39715,7 @@
                   <a:srgbClr val="1F2A37"/>
                 </a:solidFill>
                 <a:latin typeface="Amiri" pitchFamily="2" charset="-78"/>
+                <a:ea typeface="Amiri" pitchFamily="2" charset="-78"/>
                 <a:cs typeface="Amiri" pitchFamily="2" charset="-78"/>
               </a:rPr>
               <a:t>دَرَسَ</a:t>
@@ -39617,6 +39817,7 @@
                   <a:srgbClr val="1F2A37"/>
                 </a:solidFill>
                 <a:latin typeface="Amiri" pitchFamily="2" charset="-78"/>
+                <a:ea typeface="Amiri" pitchFamily="2" charset="-78"/>
                 <a:cs typeface="Amiri" pitchFamily="2" charset="-78"/>
               </a:rPr>
               <a:t>كَتَبَ</a:t>
@@ -39853,6 +40054,7 @@
                   <a:srgbClr val="1F2A37"/>
                 </a:solidFill>
                 <a:latin typeface="Amiri" pitchFamily="2" charset="-78"/>
+                <a:ea typeface="Amiri" pitchFamily="2" charset="-78"/>
                 <a:cs typeface="Amiri" pitchFamily="2" charset="-78"/>
               </a:rPr>
               <a:t>قَرَأَ</a:t>
@@ -39954,6 +40156,7 @@
                   <a:srgbClr val="1F2A37"/>
                 </a:solidFill>
                 <a:latin typeface="Amiri" pitchFamily="2" charset="-78"/>
+                <a:ea typeface="Amiri" pitchFamily="2" charset="-78"/>
                 <a:cs typeface="Amiri" pitchFamily="2" charset="-78"/>
               </a:rPr>
               <a:t>كَتَبَ</a:t>
@@ -40055,6 +40258,7 @@
                   <a:srgbClr val="1F2A37"/>
                 </a:solidFill>
                 <a:latin typeface="Amiri" pitchFamily="2" charset="-78"/>
+                <a:ea typeface="Amiri" pitchFamily="2" charset="-78"/>
                 <a:cs typeface="Amiri" pitchFamily="2" charset="-78"/>
               </a:rPr>
               <a:t>جَلَسَ</a:t>
@@ -40390,6 +40594,7 @@
                   <a:srgbClr val="D4AF37"/>
                 </a:solidFill>
                 <a:latin typeface="Amiri" pitchFamily="2" charset="-78"/>
+                <a:ea typeface="Amiri" pitchFamily="2" charset="-78"/>
                 <a:cs typeface="Amiri" pitchFamily="2" charset="-78"/>
               </a:rPr>
               <a:t>م</a:t>
@@ -40710,6 +40915,7 @@
                   <a:srgbClr val="8A6D1E"/>
                 </a:solidFill>
                 <a:latin typeface="Amiri" pitchFamily="2" charset="-78"/>
+                <a:ea typeface="Amiri" pitchFamily="2" charset="-78"/>
                 <a:cs typeface="Amiri" pitchFamily="2" charset="-78"/>
               </a:rPr>
               <a:t>الإِجَابَاتُ وَالتَّعْلِيلُ</a:t>
@@ -40984,6 +41190,7 @@
                   <a:srgbClr val="9AA1AB"/>
                 </a:solidFill>
                 <a:latin typeface="Amiri" pitchFamily="2" charset="-78"/>
+                <a:ea typeface="Amiri" pitchFamily="2" charset="-78"/>
                 <a:cs typeface="Amiri" pitchFamily="2" charset="-78"/>
               </a:rPr>
               <a:t>٨</a:t>
@@ -41112,6 +41319,7 @@
                   <a:srgbClr val="1F2A37"/>
                 </a:solidFill>
                 <a:latin typeface="Amiri" pitchFamily="2" charset="-78"/>
+                <a:ea typeface="Amiri" pitchFamily="2" charset="-78"/>
                 <a:cs typeface="Amiri" pitchFamily="2" charset="-78"/>
               </a:rPr>
               <a:t>٧</a:t>
@@ -41213,6 +41421,7 @@
                   <a:srgbClr val="9AA1AB"/>
                 </a:solidFill>
                 <a:latin typeface="Amiri" pitchFamily="2" charset="-78"/>
+                <a:ea typeface="Amiri" pitchFamily="2" charset="-78"/>
                 <a:cs typeface="Amiri" pitchFamily="2" charset="-78"/>
               </a:rPr>
               <a:t>٦</a:t>
@@ -41399,6 +41608,7 @@
                   <a:srgbClr val="1B3B6F"/>
                 </a:solidFill>
                 <a:latin typeface="Amiri" pitchFamily="2" charset="-78"/>
+                <a:ea typeface="Amiri" pitchFamily="2" charset="-78"/>
                 <a:cs typeface="Amiri" pitchFamily="2" charset="-78"/>
               </a:rPr>
               <a:t>١٥</a:t>
@@ -42016,6 +42226,7 @@
                   <a:srgbClr val="9AA1AB"/>
                 </a:solidFill>
                 <a:latin typeface="Amiri" pitchFamily="2" charset="-78"/>
+                <a:ea typeface="Amiri" pitchFamily="2" charset="-78"/>
                 <a:cs typeface="Amiri" pitchFamily="2" charset="-78"/>
               </a:rPr>
               <a:t>عِشْرُونَ</a:t>
@@ -42117,6 +42328,7 @@
                   <a:srgbClr val="9AA1AB"/>
                 </a:solidFill>
                 <a:latin typeface="Amiri" pitchFamily="2" charset="-78"/>
+                <a:ea typeface="Amiri" pitchFamily="2" charset="-78"/>
                 <a:cs typeface="Amiri" pitchFamily="2" charset="-78"/>
               </a:rPr>
               <a:t>وَاحِدٌ</a:t>
@@ -42245,6 +42457,7 @@
                   <a:srgbClr val="1F2A37"/>
                 </a:solidFill>
                 <a:latin typeface="Amiri" pitchFamily="2" charset="-78"/>
+                <a:ea typeface="Amiri" pitchFamily="2" charset="-78"/>
                 <a:cs typeface="Amiri" pitchFamily="2" charset="-78"/>
               </a:rPr>
               <a:t>عَشَرَةٌ</a:t>
@@ -42519,6 +42732,7 @@
                   <a:srgbClr val="9AA1AB"/>
                 </a:solidFill>
                 <a:latin typeface="Amiri" pitchFamily="2" charset="-78"/>
+                <a:ea typeface="Amiri" pitchFamily="2" charset="-78"/>
                 <a:cs typeface="Amiri" pitchFamily="2" charset="-78"/>
               </a:rPr>
               <a:t>قَرَأَ</a:t>
@@ -42620,6 +42834,7 @@
                   <a:srgbClr val="9AA1AB"/>
                 </a:solidFill>
                 <a:latin typeface="Amiri" pitchFamily="2" charset="-78"/>
+                <a:ea typeface="Amiri" pitchFamily="2" charset="-78"/>
                 <a:cs typeface="Amiri" pitchFamily="2" charset="-78"/>
               </a:rPr>
               <a:t>دَرَسَ</a:t>
@@ -42748,6 +42963,7 @@
                   <a:srgbClr val="1F2A37"/>
                 </a:solidFill>
                 <a:latin typeface="Amiri" pitchFamily="2" charset="-78"/>
+                <a:ea typeface="Amiri" pitchFamily="2" charset="-78"/>
                 <a:cs typeface="Amiri" pitchFamily="2" charset="-78"/>
               </a:rPr>
               <a:t>كَتَبَ</a:t>
@@ -42799,6 +43015,7 @@
                   <a:srgbClr val="8A6D1E"/>
                 </a:solidFill>
                 <a:latin typeface="Amiri" pitchFamily="2" charset="-78"/>
+                <a:ea typeface="Amiri" pitchFamily="2" charset="-78"/>
                 <a:cs typeface="Amiri" pitchFamily="2" charset="-78"/>
               </a:rPr>
               <a:t>كَتَبَ</a:t>
@@ -43075,6 +43292,7 @@
                   <a:srgbClr val="1F2A37"/>
                 </a:solidFill>
                 <a:latin typeface="Amiri" pitchFamily="2" charset="-78"/>
+                <a:ea typeface="Amiri" pitchFamily="2" charset="-78"/>
                 <a:cs typeface="Amiri" pitchFamily="2" charset="-78"/>
               </a:rPr>
               <a:t>قَرَأَ</a:t>
@@ -43176,6 +43394,7 @@
                   <a:srgbClr val="9AA1AB"/>
                 </a:solidFill>
                 <a:latin typeface="Amiri" pitchFamily="2" charset="-78"/>
+                <a:ea typeface="Amiri" pitchFamily="2" charset="-78"/>
                 <a:cs typeface="Amiri" pitchFamily="2" charset="-78"/>
               </a:rPr>
               <a:t>كَتَبَ</a:t>
@@ -43277,6 +43496,7 @@
                   <a:srgbClr val="9AA1AB"/>
                 </a:solidFill>
                 <a:latin typeface="Amiri" pitchFamily="2" charset="-78"/>
+                <a:ea typeface="Amiri" pitchFamily="2" charset="-78"/>
                 <a:cs typeface="Amiri" pitchFamily="2" charset="-78"/>
               </a:rPr>
               <a:t>جَلَسَ</a:t>
@@ -43328,6 +43548,7 @@
                   <a:srgbClr val="8A6D1E"/>
                 </a:solidFill>
                 <a:latin typeface="Amiri" pitchFamily="2" charset="-78"/>
+                <a:ea typeface="Amiri" pitchFamily="2" charset="-78"/>
                 <a:cs typeface="Amiri" pitchFamily="2" charset="-78"/>
               </a:rPr>
               <a:t>قَرَأَ</a:t>
@@ -43489,6 +43710,7 @@
                   <a:srgbClr val="1B3B6F"/>
                 </a:solidFill>
                 <a:latin typeface="Amiri" pitchFamily="2" charset="-78"/>
+                <a:ea typeface="Amiri" pitchFamily="2" charset="-78"/>
                 <a:cs typeface="Amiri" pitchFamily="2" charset="-78"/>
               </a:rPr>
               <a:t>كَ + تَ + بَ ← كَتَبَ</a:t>
@@ -43622,6 +43844,7 @@
                   <a:srgbClr val="D4AF37"/>
                 </a:solidFill>
                 <a:latin typeface="Amiri" pitchFamily="2" charset="-78"/>
+                <a:ea typeface="Amiri" pitchFamily="2" charset="-78"/>
                 <a:cs typeface="Amiri" pitchFamily="2" charset="-78"/>
               </a:rPr>
               <a:t>م</a:t>
@@ -43942,6 +44165,7 @@
                   <a:srgbClr val="8A6D1E"/>
                 </a:solidFill>
                 <a:latin typeface="Amiri" pitchFamily="2" charset="-78"/>
+                <a:ea typeface="Amiri" pitchFamily="2" charset="-78"/>
                 <a:cs typeface="Amiri" pitchFamily="2" charset="-78"/>
               </a:rPr>
               <a:t>الأَهْدَافُ وَمَعَايِيرُ النَّجَاحِ</a:t>
@@ -44090,6 +44314,7 @@
                   <a:srgbClr val="8A6D1E"/>
                 </a:solidFill>
                 <a:latin typeface="Amiri" pitchFamily="2" charset="-78"/>
+                <a:ea typeface="Amiri" pitchFamily="2" charset="-78"/>
                 <a:cs typeface="Amiri" pitchFamily="2" charset="-78"/>
               </a:rPr>
               <a:t>سَتَتَعَلَّمُ اليَوْمَ</a:t>
@@ -45348,6 +45573,7 @@
                   <a:srgbClr val="D4AF37"/>
                 </a:solidFill>
                 <a:latin typeface="Amiri" pitchFamily="2" charset="-78"/>
+                <a:ea typeface="Amiri" pitchFamily="2" charset="-78"/>
                 <a:cs typeface="Amiri" pitchFamily="2" charset="-78"/>
               </a:rPr>
               <a:t>كَلِمَاتُ الدَّرْسِ</a:t>
@@ -45813,6 +46039,7 @@
                   <a:srgbClr val="1B3B6F"/>
                 </a:solidFill>
                 <a:latin typeface="Amiri" pitchFamily="2" charset="-78"/>
+                <a:ea typeface="Amiri" pitchFamily="2" charset="-78"/>
                 <a:cs typeface="Amiri" pitchFamily="2" charset="-78"/>
               </a:rPr>
               <a:t>قَرَأَ</a:t>
@@ -45846,11 +46073,12 @@
               <a:buNone/>
             </a:pPr>
             <a:r>
-              <a:rPr lang="ur-PK" altLang="en-US" sz="1400" b="1" dirty="0">
+              <a:rPr lang="ar-SA" altLang="en-US" sz="1400" b="1" dirty="0">
                 <a:solidFill>
                   <a:srgbClr val="2E8B57"/>
                 </a:solidFill>
                 <a:latin typeface="Amiri" pitchFamily="2" charset="-78"/>
+                <a:ea typeface="Amiri" pitchFamily="2" charset="-78"/>
                 <a:cs typeface="Amiri" pitchFamily="2" charset="-78"/>
               </a:rPr>
               <a:t>‎قراءت‎ </a:t>
@@ -45902,6 +46130,7 @@
                   <a:srgbClr val="1B3B6F"/>
                 </a:solidFill>
                 <a:latin typeface="Amiri" pitchFamily="2" charset="-78"/>
+                <a:ea typeface="Amiri" pitchFamily="2" charset="-78"/>
                 <a:cs typeface="Amiri" pitchFamily="2" charset="-78"/>
               </a:rPr>
               <a:t>كِتَابٌ</a:t>
@@ -45935,11 +46164,12 @@
               <a:buNone/>
             </a:pPr>
             <a:r>
-              <a:rPr lang="ur-PK" altLang="en-US" sz="1400" b="1" dirty="0">
+              <a:rPr lang="ar-SA" altLang="en-US" sz="1400" b="1" dirty="0">
                 <a:solidFill>
                   <a:srgbClr val="2E8B57"/>
                 </a:solidFill>
                 <a:latin typeface="Amiri" pitchFamily="2" charset="-78"/>
+                <a:ea typeface="Amiri" pitchFamily="2" charset="-78"/>
                 <a:cs typeface="Amiri" pitchFamily="2" charset="-78"/>
               </a:rPr>
               <a:t>‎کتاب‎ </a:t>
@@ -45991,6 +46221,7 @@
                   <a:srgbClr val="1B3B6F"/>
                 </a:solidFill>
                 <a:latin typeface="Amiri" pitchFamily="2" charset="-78"/>
+                <a:ea typeface="Amiri" pitchFamily="2" charset="-78"/>
                 <a:cs typeface="Amiri" pitchFamily="2" charset="-78"/>
               </a:rPr>
               <a:t>مَكْتَبٌ</a:t>
@@ -46024,11 +46255,12 @@
               <a:buNone/>
             </a:pPr>
             <a:r>
-              <a:rPr lang="ur-PK" altLang="en-US" sz="1400" b="1" dirty="0">
+              <a:rPr lang="ar-SA" altLang="en-US" sz="1400" b="1" dirty="0">
                 <a:solidFill>
                   <a:srgbClr val="2E8B57"/>
                 </a:solidFill>
                 <a:latin typeface="Amiri" pitchFamily="2" charset="-78"/>
+                <a:ea typeface="Amiri" pitchFamily="2" charset="-78"/>
                 <a:cs typeface="Amiri" pitchFamily="2" charset="-78"/>
               </a:rPr>
               <a:t>‎مکتب‎ </a:t>
@@ -46080,6 +46312,7 @@
                   <a:srgbClr val="1B3B6F"/>
                 </a:solidFill>
                 <a:latin typeface="Amiri" pitchFamily="2" charset="-78"/>
+                <a:ea typeface="Amiri" pitchFamily="2" charset="-78"/>
                 <a:cs typeface="Amiri" pitchFamily="2" charset="-78"/>
               </a:rPr>
               <a:t>مُعَلِّمٌ</a:t>
@@ -46113,11 +46346,12 @@
               <a:buNone/>
             </a:pPr>
             <a:r>
-              <a:rPr lang="ur-PK" altLang="en-US" sz="1400" b="1" dirty="0">
+              <a:rPr lang="ar-SA" altLang="en-US" sz="1400" b="1" dirty="0">
                 <a:solidFill>
                   <a:srgbClr val="2E8B57"/>
                 </a:solidFill>
                 <a:latin typeface="Amiri" pitchFamily="2" charset="-78"/>
+                <a:ea typeface="Amiri" pitchFamily="2" charset="-78"/>
                 <a:cs typeface="Amiri" pitchFamily="2" charset="-78"/>
               </a:rPr>
               <a:t>‎معلم‎ </a:t>
@@ -46169,6 +46403,7 @@
                   <a:srgbClr val="1B3B6F"/>
                 </a:solidFill>
                 <a:latin typeface="Amiri" pitchFamily="2" charset="-78"/>
+                <a:ea typeface="Amiri" pitchFamily="2" charset="-78"/>
                 <a:cs typeface="Amiri" pitchFamily="2" charset="-78"/>
               </a:rPr>
               <a:t>مَدْرَسَةٌ</a:t>
@@ -46202,11 +46437,12 @@
               <a:buNone/>
             </a:pPr>
             <a:r>
-              <a:rPr lang="ur-PK" altLang="en-US" sz="1400" b="1" dirty="0">
+              <a:rPr lang="ar-SA" altLang="en-US" sz="1400" b="1" dirty="0">
                 <a:solidFill>
                   <a:srgbClr val="2E8B57"/>
                 </a:solidFill>
                 <a:latin typeface="Amiri" pitchFamily="2" charset="-78"/>
+                <a:ea typeface="Amiri" pitchFamily="2" charset="-78"/>
                 <a:cs typeface="Amiri" pitchFamily="2" charset="-78"/>
               </a:rPr>
               <a:t>‎مدرسہ‎ </a:t>
@@ -46353,6 +46589,7 @@
                   <a:srgbClr val="D4AF37"/>
                 </a:solidFill>
                 <a:latin typeface="Amiri" pitchFamily="2" charset="-78"/>
+                <a:ea typeface="Amiri" pitchFamily="2" charset="-78"/>
                 <a:cs typeface="Amiri" pitchFamily="2" charset="-78"/>
               </a:rPr>
               <a:t>م</a:t>
@@ -46673,6 +46910,7 @@
                   <a:srgbClr val="8A6D1E"/>
                 </a:solidFill>
                 <a:latin typeface="Amiri" pitchFamily="2" charset="-78"/>
+                <a:ea typeface="Amiri" pitchFamily="2" charset="-78"/>
                 <a:cs typeface="Amiri" pitchFamily="2" charset="-78"/>
               </a:rPr>
               <a:t>خُطُوَاتُ فَكِّ الرُّمُوزِ</a:t>
@@ -46850,6 +47088,7 @@
                   <a:srgbClr val="FFFFFF"/>
                 </a:solidFill>
                 <a:latin typeface="Amiri" pitchFamily="2" charset="-78"/>
+                <a:ea typeface="Amiri" pitchFamily="2" charset="-78"/>
                 <a:cs typeface="Amiri" pitchFamily="2" charset="-78"/>
               </a:rPr>
               <a:t>كَتَبَ</a:t>
@@ -47017,6 +47256,7 @@
                   <a:srgbClr val="5A6472"/>
                 </a:solidFill>
                 <a:latin typeface="Amiri" pitchFamily="2" charset="-78"/>
+                <a:ea typeface="Amiri" pitchFamily="2" charset="-78"/>
                 <a:cs typeface="Amiri" pitchFamily="2" charset="-78"/>
               </a:rPr>
               <a:t>ك</a:t>
@@ -47043,6 +47283,7 @@
                   <a:srgbClr val="5A6472"/>
                 </a:solidFill>
                 <a:latin typeface="Amiri" pitchFamily="2" charset="-78"/>
+                <a:ea typeface="Amiri" pitchFamily="2" charset="-78"/>
                 <a:cs typeface="Amiri" pitchFamily="2" charset="-78"/>
               </a:rPr>
               <a:t>ب</a:t>
@@ -47262,6 +47503,7 @@
                   <a:srgbClr val="1B3B6F"/>
                 </a:solidFill>
                 <a:latin typeface="Amiri" pitchFamily="2" charset="-78"/>
+                <a:ea typeface="Amiri" pitchFamily="2" charset="-78"/>
                 <a:cs typeface="Amiri" pitchFamily="2" charset="-78"/>
               </a:rPr>
               <a:t>ك ← ت ← ب</a:t>
@@ -47481,6 +47723,7 @@
                   <a:srgbClr val="5A6472"/>
                 </a:solidFill>
                 <a:latin typeface="Amiri" pitchFamily="2" charset="-78"/>
+                <a:ea typeface="Amiri" pitchFamily="2" charset="-78"/>
                 <a:cs typeface="Amiri" pitchFamily="2" charset="-78"/>
               </a:rPr>
               <a:t>كَ، تَ، بَ</a:t>
@@ -47687,6 +47930,7 @@
                   <a:srgbClr val="5A6472"/>
                 </a:solidFill>
                 <a:latin typeface="Amiri" pitchFamily="2" charset="-78"/>
+                <a:ea typeface="Amiri" pitchFamily="2" charset="-78"/>
                 <a:cs typeface="Amiri" pitchFamily="2" charset="-78"/>
               </a:rPr>
               <a:t>كَ</a:t>
@@ -47713,6 +47957,7 @@
                   <a:srgbClr val="5A6472"/>
                 </a:solidFill>
                 <a:latin typeface="Amiri" pitchFamily="2" charset="-78"/>
+                <a:ea typeface="Amiri" pitchFamily="2" charset="-78"/>
                 <a:cs typeface="Amiri" pitchFamily="2" charset="-78"/>
               </a:rPr>
               <a:t>تَ</a:t>
@@ -47739,6 +47984,7 @@
                   <a:srgbClr val="5A6472"/>
                 </a:solidFill>
                 <a:latin typeface="Amiri" pitchFamily="2" charset="-78"/>
+                <a:ea typeface="Amiri" pitchFamily="2" charset="-78"/>
                 <a:cs typeface="Amiri" pitchFamily="2" charset="-78"/>
               </a:rPr>
               <a:t>بَ</a:t>
@@ -47958,6 +48204,7 @@
                   <a:srgbClr val="5A6472"/>
                 </a:solidFill>
                 <a:latin typeface="Amiri" pitchFamily="2" charset="-78"/>
+                <a:ea typeface="Amiri" pitchFamily="2" charset="-78"/>
                 <a:cs typeface="Amiri" pitchFamily="2" charset="-78"/>
               </a:rPr>
               <a:t>كَتَبَ</a:t>
@@ -48169,6 +48416,7 @@
                   <a:srgbClr val="D4AF37"/>
                 </a:solidFill>
                 <a:latin typeface="Amiri" pitchFamily="2" charset="-78"/>
+                <a:ea typeface="Amiri" pitchFamily="2" charset="-78"/>
                 <a:cs typeface="Amiri" pitchFamily="2" charset="-78"/>
               </a:rPr>
               <a:t>م</a:t>
@@ -48489,6 +48737,7 @@
                   <a:srgbClr val="8A6D1E"/>
                 </a:solidFill>
                 <a:latin typeface="Amiri" pitchFamily="2" charset="-78"/>
+                <a:ea typeface="Amiri" pitchFamily="2" charset="-78"/>
                 <a:cs typeface="Amiri" pitchFamily="2" charset="-78"/>
               </a:rPr>
               <a:t>مِنَ العَلَامَةِ إِلَى الصَّوْتِ</a:t>
@@ -48845,6 +49094,7 @@
                   <a:srgbClr val="1B3B6F"/>
                 </a:solidFill>
                 <a:latin typeface="Amiri" pitchFamily="2" charset="-78"/>
+                <a:ea typeface="Amiri" pitchFamily="2" charset="-78"/>
                 <a:cs typeface="Amiri" pitchFamily="2" charset="-78"/>
               </a:rPr>
               <a:t>بَ  بِ  بُ</a:t>
@@ -49089,6 +49339,7 @@
                   <a:srgbClr val="1B3B6F"/>
                 </a:solidFill>
                 <a:latin typeface="Amiri" pitchFamily="2" charset="-78"/>
+                <a:ea typeface="Amiri" pitchFamily="2" charset="-78"/>
                 <a:cs typeface="Amiri" pitchFamily="2" charset="-78"/>
               </a:rPr>
               <a:t>مَكْ</a:t>
@@ -49333,6 +49584,7 @@
                   <a:srgbClr val="1B3B6F"/>
                 </a:solidFill>
                 <a:latin typeface="Amiri" pitchFamily="2" charset="-78"/>
+                <a:ea typeface="Amiri" pitchFamily="2" charset="-78"/>
                 <a:cs typeface="Amiri" pitchFamily="2" charset="-78"/>
               </a:rPr>
               <a:t>بَاب · نُور</a:t>
@@ -49577,6 +49829,7 @@
                   <a:srgbClr val="1B3B6F"/>
                 </a:solidFill>
                 <a:latin typeface="Amiri" pitchFamily="2" charset="-78"/>
+                <a:ea typeface="Amiri" pitchFamily="2" charset="-78"/>
                 <a:cs typeface="Amiri" pitchFamily="2" charset="-78"/>
               </a:rPr>
               <a:t>مُعَلِّمٌ</a:t>
@@ -49756,6 +50009,7 @@
                   <a:srgbClr val="1B3B6F"/>
                 </a:solidFill>
                 <a:latin typeface="Amiri" pitchFamily="2" charset="-78"/>
+                <a:ea typeface="Amiri" pitchFamily="2" charset="-78"/>
                 <a:cs typeface="Amiri" pitchFamily="2" charset="-78"/>
               </a:rPr>
               <a:t>كِتَابٌ</a:t>
@@ -49935,6 +50189,7 @@
                   <a:srgbClr val="1B3B6F"/>
                 </a:solidFill>
                 <a:latin typeface="Amiri" pitchFamily="2" charset="-78"/>
+                <a:ea typeface="Amiri" pitchFamily="2" charset="-78"/>
                 <a:cs typeface="Amiri" pitchFamily="2" charset="-78"/>
               </a:rPr>
               <a:t>قَرَأَ · آمِنٌ</a:t>
@@ -50071,13 +50326,9 @@
     <a:fontScheme name="Office">
       <a:majorFont>
         <a:latin typeface="Calibri Light" panose="020F0302020204030204"/>
-        <a:ea typeface=""/>
-        <a:cs typeface=""/>
-        <a:font script="Jpan" typeface="游ゴシック Light"/>
-        <a:font script="Hang" typeface="맑은 고딕"/>
-        <a:font script="Hans" typeface="等线 Light"/>
-        <a:font script="Hant" typeface="新細明體"/>
-        <a:font script="Arab" typeface="Times New Roman"/>
+        <a:ea typeface="Amiri" pitchFamily="2" charset="-78"/>
+        <a:cs typeface="Amiri" pitchFamily="2" charset="-78"/>
+        <a:font script="Arab" typeface="Amiri"/>
         <a:font script="Hebr" typeface="Times New Roman"/>
         <a:font script="Thai" typeface="Angsana New"/>
         <a:font script="Ethi" typeface="Nyala"/>
@@ -50123,13 +50374,9 @@
       </a:majorFont>
       <a:minorFont>
         <a:latin typeface="Calibri" panose="020F0502020204030204"/>
-        <a:ea typeface=""/>
-        <a:cs typeface=""/>
-        <a:font script="Jpan" typeface="游ゴシック"/>
-        <a:font script="Hang" typeface="맑은 고딕"/>
-        <a:font script="Hans" typeface="等线"/>
-        <a:font script="Hant" typeface="新細明體"/>
-        <a:font script="Arab" typeface="Arial"/>
+        <a:ea typeface="Amiri" pitchFamily="2" charset="-78"/>
+        <a:cs typeface="Amiri" pitchFamily="2" charset="-78"/>
+        <a:font script="Arab" typeface="Amiri"/>
         <a:font script="Hebr" typeface="Arial"/>
         <a:font script="Thai" typeface="Cordia New"/>
         <a:font script="Ethi" typeface="Nyala"/>
